--- a/docs/Model_Surgery_Deck.pptx
+++ b/docs/Model_Surgery_Deck.pptx
@@ -653,7 +653,7 @@
           <a:lstStyle/>
           <a:p>
             <a:r>
-              <a:t>Name a REAL limitation, not a fake-humble one. The PS defines a strong submission as one with a disclosed limitation and penalises overclaiming heavily. If toy scale failed to reproduce the paper's asymmetry, this is where that goes - as an honest difference between reimplementation and published system.</a:t>
+              <a:t>Name real limitations, not fake-humble ones. The directional-difference bullet is a retraction - say that word out loud if asked; it shows evidence discipline, not weakness. The open-question bullet is the honest close: we don't know if the metric or the hypothesis is wrong, and resolving that is next-experiment territory, not this one's failure.</a:t>
             </a:r>
           </a:p>
         </p:txBody>
@@ -793,7 +793,7 @@
           <a:lstStyle/>
           <a:p>
             <a:r>
-              <a:t>Say the claim, then immediately say what would prove it wrong. Judges explicitly score the one-sentence claim and whether the artifact could in principle reveal it is wrong. Volunteering the falsifier unprompted is worth more than polish.</a:t>
+              <a:t>Say the claim, then say plainly that both halves were falsified. This is an honest negative result on a question arXiv:2509.26507 SS7.1 raises but never tests, not a failure - say that explicitly. The averaging control (worse than concat in 33/33 runs) and the theta relationship are real positive findings and they stand on their own.</a:t>
             </a:r>
           </a:p>
         </p:txBody>
@@ -1073,7 +1073,7 @@
           <a:lstStyle/>
           <a:p>
             <a:r>
-              <a:t>Make the theta-versus-M distinction explicitly. Plotting against theta alone would only show our data generator affects merging; plotting against measured M is what makes the claim about representations. A judge who knows experimental design will notice if you skip this.</a:t>
+              <a:t>Say plainly that the roles reversed from how we designed the experiment: we built M to be the star and theta the mechanism that generates a spread of M. M came back flat; theta carries the entire relationship. That reversal is itself worth narrating, not glossing over.</a:t>
             </a:r>
           </a:p>
         </p:txBody>
@@ -1143,7 +1143,7 @@
           <a:lstStyle/>
           <a:p>
             <a:r>
-              <a:t>Spend real time here. Most hackathon projects have no controls at all, so this slide differentiates you at zero cost. If time is short in the live round, the random-ablation baseline is the one to mention - without it, the surgery result means nothing.</a:t>
+              <a:t>Spend real time here. The averaging arm and random-ablation baseline are the two that carry the project's actual findings - say what each one showed, not just that it exists. Volunteer the deferred fourth control before being asked; it is disclosed in the README's limitations section too.</a:t>
             </a:r>
           </a:p>
         </p:txBody>
@@ -1213,7 +1213,7 @@
           <a:lstStyle/>
           <a:p>
             <a:r>
-              <a:t>This is the payload. Walk the curve left to right in words. Every point has an error bar; if a judge asks 'how do you know that dip is real?', the answer is seed variance, not 'it looked like that'.</a:t>
+              <a:t>This is the payload, and it inverts the plan: theta is the strong signal, M (the thing we built the metric for) is flat. Walk the theta column left to right - it falls from 0.77 to 0.22 with only one small rise, 0.2 to 0.3. Then point at the M column and say it never moves.</a:t>
             </a:r>
           </a:p>
         </p:txBody>
@@ -1283,7 +1283,7 @@
           <a:lstStyle/>
           <a:p>
             <a:r>
-              <a:t>The moment the audience remembers: merge, watch it break, find the culprits, cut, watch it recover. Run it live. ALWAYS show the random baseline in the same breath - the result is the DIFFERENCE, not the recovery.</a:t>
+              <a:t>This is the honest twist: we ran the localization check for the first time during this review and it does not hold up. Say that plainly. The reportable number is always the difference (random minus collision), and five of six cells here are negative - collision-ablated loss sits at or above baseline.</a:t>
             </a:r>
           </a:p>
         </p:txBody>
@@ -4434,7 +4434,7 @@
         <p:spPr>
           <a:xfrm>
             <a:off x="777240" y="4572000"/>
-            <a:ext cx="10637215" cy="1280160"/>
+            <a:ext cx="10637215" cy="1920240"/>
           </a:xfrm>
           <a:prstGeom prst="rect">
             <a:avLst/>
@@ -4800,7 +4800,7 @@
                 </a:solidFill>
                 <a:latin typeface="Calibri"/>
               </a:rPr>
-              <a:t> — n capped at ___, sequence length capped at ___. No hidden limits.</a:t>
+              <a:t> — n capped at 1024 per parent (2048 merged), sequence length capped at 16. No hidden limits.</a:t>
             </a:r>
           </a:p>
         </p:txBody>
@@ -5066,7 +5066,25 @@
                 </a:solidFill>
                 <a:latin typeface="Calibri"/>
               </a:rPr>
-              <a:t> This does not speak for the reported 1B–600B pretraining runs.</a:t>
+              <a:t> This does not speak for the paper's reported </a:t>
+            </a:r>
+            <a:r>
+              <a:rPr sz="1700" b="1" i="0">
+                <a:solidFill>
+                  <a:srgbClr val="2B2B2B"/>
+                </a:solidFill>
+                <a:latin typeface="Calibri"/>
+              </a:rPr>
+              <a:t>10M–1B</a:t>
+            </a:r>
+            <a:r>
+              <a:rPr sz="1700" b="0" i="0">
+                <a:solidFill>
+                  <a:srgbClr val="2B2B2B"/>
+                </a:solidFill>
+                <a:latin typeface="Calibri"/>
+              </a:rPr>
+              <a:t> pretraining runs.</a:t>
             </a:r>
           </a:p>
           <a:p>
@@ -5171,12 +5189,49 @@
               </a:spcAft>
             </a:pPr>
             <a:r>
+              <a:rPr sz="1700" b="0" i="0">
+                <a:solidFill>
+                  <a:srgbClr val="2B2B2B"/>
+                </a:solidFill>
+                <a:latin typeface="Calibri"/>
+              </a:rPr>
+              <a:t>We measured a directional difference in damage between the two target languages (θ = 1: 0.344 vs. 0.091), but it is </a:t>
+            </a:r>
+            <a:r>
               <a:rPr sz="1700" b="1" i="0">
                 <a:solidFill>
                   <a:srgbClr val="2B2B2B"/>
                 </a:solidFill>
                 <a:latin typeface="Calibri"/>
               </a:rPr>
+              <a:t>not</a:t>
+            </a:r>
+            <a:r>
+              <a:rPr sz="1700" b="0" i="0">
+                <a:solidFill>
+                  <a:srgbClr val="2B2B2B"/>
+                </a:solidFill>
+                <a:latin typeface="Calibri"/>
+              </a:rPr>
+              <a:t> the paper's into/out-of-pivot asymmetry — both our eval directions run pivot→target, and the effect is seed-0-dominated. We retract our earlier description of it as a reproduction.</a:t>
+            </a:r>
+          </a:p>
+          <a:p>
+            <a:pPr>
+              <a:spcBef>
+                <a:spcPts val="0"/>
+              </a:spcBef>
+              <a:spcAft>
+                <a:spcPts val="1300"/>
+              </a:spcAft>
+            </a:pPr>
+            <a:r>
+              <a:rPr sz="1700" b="1" i="0">
+                <a:solidFill>
+                  <a:srgbClr val="2B2B2B"/>
+                </a:solidFill>
+                <a:latin typeface="Calibri"/>
+              </a:rPr>
               <a:t>The most important open question we could not answer:</a:t>
             </a:r>
             <a:r>
@@ -5186,7 +5241,7 @@
                 </a:solidFill>
                 <a:latin typeface="Calibri"/>
               </a:rPr>
-              <a:t> ___________.</a:t>
+              <a:t> whether representational overlap is genuinely non-predictive of mergeability, or whether our mean-over-all-neurons metric — M and the collision score alike — is mis-specified for this architecture.</a:t>
             </a:r>
           </a:p>
         </p:txBody>
@@ -5827,7 +5882,7 @@
                 </a:solidFill>
                 <a:latin typeface="Calibri"/>
               </a:rPr>
-              <a:t>The claim</a:t>
+              <a:t>The claim — revised after the sweep</a:t>
             </a:r>
           </a:p>
         </p:txBody>
@@ -6055,8 +6110,8 @@
         </p:nvSpPr>
         <p:spPr>
           <a:xfrm>
-            <a:off x="777240" y="2514600"/>
-            <a:ext cx="10637215" cy="3108960"/>
+            <a:off x="777240" y="2331720"/>
+            <a:ext cx="10637215" cy="2148840"/>
           </a:xfrm>
           <a:prstGeom prst="rect">
             <a:avLst/>
@@ -6074,26 +6129,153 @@
                 <a:spcPts val="0"/>
               </a:spcBef>
               <a:spcAft>
-                <a:spcPts val="2200"/>
+                <a:spcPts val="1400"/>
               </a:spcAft>
             </a:pPr>
             <a:r>
-              <a:rPr sz="2500" b="1" i="0">
+              <a:rPr sz="2200" b="1" i="0">
                 <a:solidFill>
                   <a:srgbClr val="0F1E3D"/>
                 </a:solidFill>
                 <a:latin typeface="Calibri"/>
               </a:rPr>
-              <a:t>Whether two BDH models survive being fused is predictable in advance from how much their neurons overlap</a:t>
-            </a:r>
-            <a:r>
-              <a:rPr sz="2500" b="0" i="0">
+              <a:t>Merge damage is strongly predictable</a:t>
+            </a:r>
+            <a:r>
+              <a:rPr sz="2200" b="0" i="0">
                 <a:solidFill>
                   <a:srgbClr val="0F1E3D"/>
                 </a:solidFill>
                 <a:latin typeface="Calibri"/>
               </a:rPr>
-              <a:t> — and where they do collide, the damage is localized to identifiable neurons rather than diffused through the model.</a:t>
+              <a:t> — from </a:t>
+            </a:r>
+            <a:r>
+              <a:rPr sz="2200" b="1" i="0">
+                <a:solidFill>
+                  <a:srgbClr val="0F1E3D"/>
+                </a:solidFill>
+                <a:latin typeface="Calibri"/>
+              </a:rPr>
+              <a:t>θ</a:t>
+            </a:r>
+            <a:r>
+              <a:rPr sz="2200" b="0" i="0">
+                <a:solidFill>
+                  <a:srgbClr val="0F1E3D"/>
+                </a:solidFill>
+                <a:latin typeface="Calibri"/>
+              </a:rPr>
+              <a:t>, how much the two parents’ training vocabularies overlap. It is </a:t>
+            </a:r>
+            <a:r>
+              <a:rPr sz="2200" b="1" i="0">
+                <a:solidFill>
+                  <a:srgbClr val="0F1E3D"/>
+                </a:solidFill>
+                <a:latin typeface="Calibri"/>
+              </a:rPr>
+              <a:t>not</a:t>
+            </a:r>
+            <a:r>
+              <a:rPr sz="2200" b="0" i="0">
+                <a:solidFill>
+                  <a:srgbClr val="0F1E3D"/>
+                </a:solidFill>
+                <a:latin typeface="Calibri"/>
+              </a:rPr>
+              <a:t> predictable from </a:t>
+            </a:r>
+            <a:r>
+              <a:rPr sz="2200" b="1" i="0">
+                <a:solidFill>
+                  <a:srgbClr val="0F1E3D"/>
+                </a:solidFill>
+                <a:latin typeface="Calibri"/>
+              </a:rPr>
+              <a:t>M</a:t>
+            </a:r>
+            <a:r>
+              <a:rPr sz="2200" b="0" i="0">
+                <a:solidFill>
+                  <a:srgbClr val="0F1E3D"/>
+                </a:solidFill>
+                <a:latin typeface="Calibri"/>
+              </a:rPr>
+              <a:t>, the neuron-activation overlap we set out to measure, and collision-ablation does not recover function.</a:t>
+            </a:r>
+          </a:p>
+          <a:p>
+            <a:pPr>
+              <a:spcBef>
+                <a:spcPts val="0"/>
+              </a:spcBef>
+              <a:spcAft>
+                <a:spcPts val="0"/>
+              </a:spcAft>
+            </a:pPr>
+            <a:r>
+              <a:rPr sz="1400" b="0" i="0">
+                <a:solidFill>
+                  <a:srgbClr val="2B2B2B"/>
+                </a:solidFill>
+                <a:latin typeface="Calibri"/>
+              </a:rPr>
+              <a:t>corr(θ, damage) = </a:t>
+            </a:r>
+            <a:r>
+              <a:rPr sz="1400" b="1" i="0">
+                <a:solidFill>
+                  <a:srgbClr val="2B2B2B"/>
+                </a:solidFill>
+                <a:latin typeface="Calibri"/>
+              </a:rPr>
+              <a:t>−0.991</a:t>
+            </a:r>
+            <a:r>
+              <a:rPr sz="1400" b="0" i="0">
+                <a:solidFill>
+                  <a:srgbClr val="2B2B2B"/>
+                </a:solidFill>
+                <a:latin typeface="Calibri"/>
+              </a:rPr>
+              <a:t> across the 11 per-θ means (</a:t>
+            </a:r>
+            <a:r>
+              <a:rPr sz="1400" b="1" i="0">
+                <a:solidFill>
+                  <a:srgbClr val="2B2B2B"/>
+                </a:solidFill>
+                <a:latin typeface="Calibri"/>
+              </a:rPr>
+              <a:t>−0.790</a:t>
+            </a:r>
+            <a:r>
+              <a:rPr sz="1400" b="0" i="0">
+                <a:solidFill>
+                  <a:srgbClr val="2B2B2B"/>
+                </a:solidFill>
+                <a:latin typeface="Calibri"/>
+              </a:rPr>
+              <a:t> across all 33 runs). M stays flat at </a:t>
+            </a:r>
+            <a:r>
+              <a:rPr sz="1400" b="1" i="0">
+                <a:solidFill>
+                  <a:srgbClr val="2B2B2B"/>
+                </a:solidFill>
+                <a:latin typeface="Calibri"/>
+              </a:rPr>
+              <a:t>0.704–0.728</a:t>
+            </a:r>
+            <a:r>
+              <a:rPr sz="1400" b="0" i="0">
+                <a:solidFill>
+                  <a:srgbClr val="2B2B2B"/>
+                </a:solidFill>
+                <a:latin typeface="Calibri"/>
+              </a:rPr>
+              <a:t> throughout.</a:t>
             </a:r>
           </a:p>
         </p:txBody>
@@ -6106,8 +6288,8 @@
         </p:nvSpPr>
         <p:spPr>
           <a:xfrm>
-            <a:off x="777240" y="4892040"/>
-            <a:ext cx="10637215" cy="1280160"/>
+            <a:off x="777240" y="4709160"/>
+            <a:ext cx="10637215" cy="1554480"/>
           </a:xfrm>
           <a:prstGeom prst="rect">
             <a:avLst/>
@@ -6135,7 +6317,7 @@
                 </a:solidFill>
                 <a:latin typeface="Calibri"/>
               </a:rPr>
-              <a:t>What would falsify it:</a:t>
+              <a:t>Both halves of the original hypothesis were falsified:</a:t>
             </a:r>
           </a:p>
           <a:p>
@@ -6148,13 +6330,13 @@
               </a:spcAft>
             </a:pPr>
             <a:r>
-              <a:rPr sz="1500" b="0" i="0">
-                <a:solidFill>
-                  <a:srgbClr val="2B2B2B"/>
-                </a:solidFill>
-                <a:latin typeface="Calibri"/>
-              </a:rPr>
-              <a:t>A flat damage curve — no relationship between overlap and damage.</a:t>
+              <a:rPr sz="1400" b="0" i="0">
+                <a:solidFill>
+                  <a:srgbClr val="2B2B2B"/>
+                </a:solidFill>
+                <a:latin typeface="Calibri"/>
+              </a:rPr>
+              <a:t>Mergeability was supposed to be predictable from measured neuron overlap. corr(M, damage) is −0.608 over per-θ means but flips sign to +0.174 over all 33 runs — noise on a flat metric, not a relationship.</a:t>
             </a:r>
           </a:p>
           <a:p>
@@ -6167,13 +6349,13 @@
               </a:spcAft>
             </a:pPr>
             <a:r>
-              <a:rPr sz="1500" b="0" i="0">
-                <a:solidFill>
-                  <a:srgbClr val="2B2B2B"/>
-                </a:solidFill>
-                <a:latin typeface="Calibri"/>
-              </a:rPr>
-              <a:t>Ablating our identified neurons doing no better than ablating random ones.</a:t>
+              <a:rPr sz="1400" b="0" i="0">
+                <a:solidFill>
+                  <a:srgbClr val="2B2B2B"/>
+                </a:solidFill>
+                <a:latin typeface="Calibri"/>
+              </a:rPr>
+              <a:t>Collision damage was supposed to localize to identifiable neurons. Ablating them never beats a size-matched random-ablation control — it is significantly worse at k = 100.</a:t>
             </a:r>
           </a:p>
         </p:txBody>
@@ -7710,7 +7892,7 @@
                 </a:solidFill>
                 <a:latin typeface="Calibri"/>
               </a:rPr>
-              <a:t>n ≈ 2048, d = 64, L = 2–4</a:t>
+              <a:t>n = 1024 per parent (2048 merged), d = 64, n_layer = 4</a:t>
             </a:r>
             <a:r>
               <a:rPr sz="1700" b="0" i="0">
@@ -7719,7 +7901,7 @@
                 </a:solidFill>
                 <a:latin typeface="Calibri"/>
               </a:rPr>
-              <a:t>, character-level, under 1M parameters.</a:t>
+              <a:t>, over a 96-token synthetic vocabulary — not characters — under 1M parameters.</a:t>
             </a:r>
           </a:p>
           <a:p>
@@ -8254,7 +8436,7 @@
                 </a:solidFill>
                 <a:latin typeface="Calibri"/>
               </a:rPr>
-              <a:t>measured M</a:t>
+              <a:t>θ by default</a:t>
             </a:r>
             <a:r>
               <a:rPr sz="1600" b="0" i="0">
@@ -8263,7 +8445,25 @@
                 </a:solidFill>
                 <a:latin typeface="Calibri"/>
               </a:rPr>
-              <a:t>, not θ — θ is only the mechanism that generates a spread of M.</a:t>
+              <a:t> — that turned out to carry the whole relationship — with a toggle to plot against </a:t>
+            </a:r>
+            <a:r>
+              <a:rPr sz="1600" b="1" i="0">
+                <a:solidFill>
+                  <a:srgbClr val="2B2B2B"/>
+                </a:solidFill>
+                <a:latin typeface="Calibri"/>
+              </a:rPr>
+              <a:t>M</a:t>
+            </a:r>
+            <a:r>
+              <a:rPr sz="1600" b="0" i="0">
+                <a:solidFill>
+                  <a:srgbClr val="2B2B2B"/>
+                </a:solidFill>
+                <a:latin typeface="Calibri"/>
+              </a:rPr>
+              <a:t> instead, which turned out flat throughout.</a:t>
             </a:r>
           </a:p>
         </p:txBody>
@@ -8478,7 +8678,7 @@
                 </a:solidFill>
                 <a:latin typeface="Calibri"/>
               </a:rPr>
-              <a:t>Four controls. This is what makes it an experiment instead of a demo.</a:t>
+              <a:t>Three controls. This is what makes it an experiment instead of a demo.</a:t>
             </a:r>
           </a:p>
         </p:txBody>
@@ -8529,7 +8729,7 @@
                 </a:solidFill>
                 <a:latin typeface="Calibri"/>
               </a:rPr>
-              <a:t> — rules out that any fusion would have worked.</a:t>
+              <a:t> — rules out that any fusion would have worked. It is the strongest result in the project: worse than concatenation in 33 of 33 runs and at all 11 θ values.</a:t>
             </a:r>
           </a:p>
           <a:p>
@@ -8557,7 +8757,7 @@
                 </a:solidFill>
                 <a:latin typeface="Calibri"/>
               </a:rPr>
-              <a:t> — rules out that ablating anything helps. Matched count k.</a:t>
+              <a:t> — rules out that ablating anything helps, at matched count k. Collision ablation never beats it — it is significantly worse at k = 100.</a:t>
             </a:r>
           </a:p>
           <a:p>
@@ -8585,7 +8785,7 @@
                 </a:solidFill>
                 <a:latin typeface="Calibri"/>
               </a:rPr>
-              <a:t> — merge a model with an independently seeded copy: the maximum-overlap floor.</a:t>
+              <a:t> — merge a model with a bit-identical `deepcopy` of itself, not an independently seeded retrain: the maximum-overlap floor. |D| ≤ 0.0035 across all 33 runs.</a:t>
             </a:r>
           </a:p>
           <a:p>
@@ -8598,22 +8798,13 @@
               </a:spcAft>
             </a:pPr>
             <a:r>
-              <a:rPr sz="1700" b="1" i="0">
-                <a:solidFill>
-                  <a:srgbClr val="2B2B2B"/>
-                </a:solidFill>
-                <a:latin typeface="Calibri"/>
-              </a:rPr>
-              <a:t>Parameter-count control</a:t>
-            </a:r>
-            <a:r>
               <a:rPr sz="1700" b="0" i="0">
                 <a:solidFill>
                   <a:srgbClr val="2B2B2B"/>
                 </a:solidFill>
                 <a:latin typeface="Calibri"/>
               </a:rPr>
-              <a:t> — merged 2n vs. a single parent trained at 2n: rules out a size effect.</a:t>
+              <a:t>A fourth control — merged 2n vs. a single parent trained at 2n, to rule out a pure size effect — was planned and never run. It is deferred, not silently dropped; nothing here claims otherwise.</a:t>
             </a:r>
           </a:p>
         </p:txBody>
@@ -8828,7 +9019,7 @@
                 </a:solidFill>
                 <a:latin typeface="Calibri"/>
               </a:rPr>
-              <a:t>Merging is free below ___ overlap, and degrades sharply above it.</a:t>
+              <a:t>Damage falls near-monotonically as θ rises. Measured overlap M stays flat the whole way.</a:t>
             </a:r>
           </a:p>
         </p:txBody>
@@ -8841,8 +9032,8 @@
         </p:nvSpPr>
         <p:spPr>
           <a:xfrm>
-            <a:off x="777240" y="1965960"/>
-            <a:ext cx="10637215" cy="320040"/>
+            <a:off x="777240" y="1691640"/>
+            <a:ext cx="10637215" cy="4434840"/>
           </a:xfrm>
           <a:prstGeom prst="rect">
             <a:avLst/>
@@ -8854,6 +9045,1778 @@
             <a:spAutoFit/>
           </a:bodyPr>
           <a:lstStyle/>
+          <a:p/>
+        </p:txBody>
+      </p:sp>
+      <p:sp>
+        <p:nvSpPr>
+          <p:cNvPr id="6" name="TextBox 5"/>
+          <p:cNvSpPr txBox="1"/>
+          <p:nvPr/>
+        </p:nvSpPr>
+        <p:spPr>
+          <a:xfrm>
+            <a:off x="777240" y="6355080"/>
+            <a:ext cx="10637215" cy="320040"/>
+          </a:xfrm>
+          <a:prstGeom prst="rect">
+            <a:avLst/>
+          </a:prstGeom>
+          <a:noFill/>
+        </p:spPr>
+        <p:txBody>
+          <a:bodyPr wrap="square" anchor="t" lIns="0" rIns="0" tIns="0" bIns="0">
+            <a:spAutoFit/>
+          </a:bodyPr>
+          <a:lstStyle/>
+          <a:p>
+            <a:r>
+              <a:rPr sz="1000" b="0" i="1">
+                <a:solidFill>
+                  <a:srgbClr val="707A8A"/>
+                </a:solidFill>
+                <a:latin typeface="Calibri"/>
+              </a:rPr>
+              <a:t>Technical correctness (25) + interactive substrate (15)</a:t>
+            </a:r>
+          </a:p>
+        </p:txBody>
+      </p:sp>
+      <p:sp>
+        <p:nvSpPr>
+          <p:cNvPr id="7" name="TextBox 6"/>
+          <p:cNvSpPr txBox="1"/>
+          <p:nvPr/>
+        </p:nvSpPr>
+        <p:spPr>
+          <a:xfrm>
+            <a:off x="10865815" y="6355080"/>
+            <a:ext cx="548640" cy="320040"/>
+          </a:xfrm>
+          <a:prstGeom prst="rect">
+            <a:avLst/>
+          </a:prstGeom>
+          <a:noFill/>
+        </p:spPr>
+        <p:txBody>
+          <a:bodyPr wrap="square" anchor="t" lIns="0" rIns="0" tIns="0" bIns="0">
+            <a:spAutoFit/>
+          </a:bodyPr>
+          <a:lstStyle/>
+          <a:p>
+            <a:pPr algn="r"/>
+            <a:r>
+              <a:rPr sz="1000" b="0" i="0">
+                <a:solidFill>
+                  <a:srgbClr val="707A8A"/>
+                </a:solidFill>
+                <a:latin typeface="Calibri"/>
+              </a:rPr>
+              <a:t>8</a:t>
+            </a:r>
+          </a:p>
+        </p:txBody>
+      </p:sp>
+      <p:sp>
+        <p:nvSpPr>
+          <p:cNvPr id="8" name="Rectangle 7"/>
+          <p:cNvSpPr/>
+          <p:nvPr/>
+        </p:nvSpPr>
+        <p:spPr>
+          <a:xfrm>
+            <a:off x="777240" y="2651760"/>
+            <a:ext cx="914400" cy="384048"/>
+          </a:xfrm>
+          <a:prstGeom prst="rect">
+            <a:avLst/>
+          </a:prstGeom>
+          <a:solidFill>
+            <a:srgbClr val="0F1E3D"/>
+          </a:solidFill>
+          <a:ln>
+            <a:noFill/>
+          </a:ln>
+          <a:effectLst/>
+        </p:spPr>
+        <p:style>
+          <a:lnRef idx="1">
+            <a:schemeClr val="accent1"/>
+          </a:lnRef>
+          <a:fillRef idx="3">
+            <a:schemeClr val="accent1"/>
+          </a:fillRef>
+          <a:effectRef idx="2">
+            <a:schemeClr val="accent1"/>
+          </a:effectRef>
+          <a:fontRef idx="minor">
+            <a:schemeClr val="lt1"/>
+          </a:fontRef>
+        </p:style>
+        <p:txBody>
+          <a:bodyPr rtlCol="0" anchor="ctr" wrap="square"/>
+          <a:lstStyle/>
+          <a:p>
+            <a:pPr algn="ctr"/>
+            <a:r>
+              <a:rPr sz="1200" b="1" i="0">
+                <a:solidFill>
+                  <a:srgbClr val="FFFFFF"/>
+                </a:solidFill>
+                <a:latin typeface="Calibri"/>
+              </a:rPr>
+              <a:t>θ</a:t>
+            </a:r>
+          </a:p>
+        </p:txBody>
+      </p:sp>
+      <p:sp>
+        <p:nvSpPr>
+          <p:cNvPr id="9" name="Rectangle 8"/>
+          <p:cNvSpPr/>
+          <p:nvPr/>
+        </p:nvSpPr>
+        <p:spPr>
+          <a:xfrm>
+            <a:off x="1691640" y="2651760"/>
+            <a:ext cx="1417320" cy="384048"/>
+          </a:xfrm>
+          <a:prstGeom prst="rect">
+            <a:avLst/>
+          </a:prstGeom>
+          <a:solidFill>
+            <a:srgbClr val="0F1E3D"/>
+          </a:solidFill>
+          <a:ln>
+            <a:noFill/>
+          </a:ln>
+          <a:effectLst/>
+        </p:spPr>
+        <p:style>
+          <a:lnRef idx="1">
+            <a:schemeClr val="accent1"/>
+          </a:lnRef>
+          <a:fillRef idx="3">
+            <a:schemeClr val="accent1"/>
+          </a:fillRef>
+          <a:effectRef idx="2">
+            <a:schemeClr val="accent1"/>
+          </a:effectRef>
+          <a:fontRef idx="minor">
+            <a:schemeClr val="lt1"/>
+          </a:fontRef>
+        </p:style>
+        <p:txBody>
+          <a:bodyPr rtlCol="0" anchor="ctr" wrap="square"/>
+          <a:lstStyle/>
+          <a:p>
+            <a:pPr algn="ctr"/>
+            <a:r>
+              <a:rPr sz="1200" b="1" i="0">
+                <a:solidFill>
+                  <a:srgbClr val="FFFFFF"/>
+                </a:solidFill>
+                <a:latin typeface="Calibri"/>
+              </a:rPr>
+              <a:t>D concat</a:t>
+            </a:r>
+          </a:p>
+        </p:txBody>
+      </p:sp>
+      <p:sp>
+        <p:nvSpPr>
+          <p:cNvPr id="10" name="Rectangle 9"/>
+          <p:cNvSpPr/>
+          <p:nvPr/>
+        </p:nvSpPr>
+        <p:spPr>
+          <a:xfrm>
+            <a:off x="3108960" y="2651760"/>
+            <a:ext cx="1417320" cy="384048"/>
+          </a:xfrm>
+          <a:prstGeom prst="rect">
+            <a:avLst/>
+          </a:prstGeom>
+          <a:solidFill>
+            <a:srgbClr val="0F1E3D"/>
+          </a:solidFill>
+          <a:ln>
+            <a:noFill/>
+          </a:ln>
+          <a:effectLst/>
+        </p:spPr>
+        <p:style>
+          <a:lnRef idx="1">
+            <a:schemeClr val="accent1"/>
+          </a:lnRef>
+          <a:fillRef idx="3">
+            <a:schemeClr val="accent1"/>
+          </a:fillRef>
+          <a:effectRef idx="2">
+            <a:schemeClr val="accent1"/>
+          </a:effectRef>
+          <a:fontRef idx="minor">
+            <a:schemeClr val="lt1"/>
+          </a:fontRef>
+        </p:style>
+        <p:txBody>
+          <a:bodyPr rtlCol="0" anchor="ctr" wrap="square"/>
+          <a:lstStyle/>
+          <a:p>
+            <a:pPr algn="ctr"/>
+            <a:r>
+              <a:rPr sz="1200" b="1" i="0">
+                <a:solidFill>
+                  <a:srgbClr val="FFFFFF"/>
+                </a:solidFill>
+                <a:latin typeface="Calibri"/>
+              </a:rPr>
+              <a:t>D average</a:t>
+            </a:r>
+          </a:p>
+        </p:txBody>
+      </p:sp>
+      <p:sp>
+        <p:nvSpPr>
+          <p:cNvPr id="11" name="Rectangle 10"/>
+          <p:cNvSpPr/>
+          <p:nvPr/>
+        </p:nvSpPr>
+        <p:spPr>
+          <a:xfrm>
+            <a:off x="4526280" y="2651760"/>
+            <a:ext cx="1417320" cy="384048"/>
+          </a:xfrm>
+          <a:prstGeom prst="rect">
+            <a:avLst/>
+          </a:prstGeom>
+          <a:solidFill>
+            <a:srgbClr val="0F1E3D"/>
+          </a:solidFill>
+          <a:ln>
+            <a:noFill/>
+          </a:ln>
+          <a:effectLst/>
+        </p:spPr>
+        <p:style>
+          <a:lnRef idx="1">
+            <a:schemeClr val="accent1"/>
+          </a:lnRef>
+          <a:fillRef idx="3">
+            <a:schemeClr val="accent1"/>
+          </a:fillRef>
+          <a:effectRef idx="2">
+            <a:schemeClr val="accent1"/>
+          </a:effectRef>
+          <a:fontRef idx="minor">
+            <a:schemeClr val="lt1"/>
+          </a:fontRef>
+        </p:style>
+        <p:txBody>
+          <a:bodyPr rtlCol="0" anchor="ctr" wrap="square"/>
+          <a:lstStyle/>
+          <a:p>
+            <a:pPr algn="ctr"/>
+            <a:r>
+              <a:rPr sz="1200" b="1" i="0">
+                <a:solidFill>
+                  <a:srgbClr val="FFFFFF"/>
+                </a:solidFill>
+                <a:latin typeface="Calibri"/>
+              </a:rPr>
+              <a:t>M</a:t>
+            </a:r>
+          </a:p>
+        </p:txBody>
+      </p:sp>
+      <p:sp>
+        <p:nvSpPr>
+          <p:cNvPr id="12" name="Rectangle 11"/>
+          <p:cNvSpPr/>
+          <p:nvPr/>
+        </p:nvSpPr>
+        <p:spPr>
+          <a:xfrm>
+            <a:off x="777240" y="3035808"/>
+            <a:ext cx="914400" cy="384048"/>
+          </a:xfrm>
+          <a:prstGeom prst="rect">
+            <a:avLst/>
+          </a:prstGeom>
+          <a:solidFill>
+            <a:srgbClr val="F4F7FB"/>
+          </a:solidFill>
+          <a:ln w="9525">
+            <a:solidFill>
+              <a:srgbClr val="D8DEE6"/>
+            </a:solidFill>
+          </a:ln>
+          <a:effectLst/>
+        </p:spPr>
+        <p:style>
+          <a:lnRef idx="1">
+            <a:schemeClr val="accent1"/>
+          </a:lnRef>
+          <a:fillRef idx="3">
+            <a:schemeClr val="accent1"/>
+          </a:fillRef>
+          <a:effectRef idx="2">
+            <a:schemeClr val="accent1"/>
+          </a:effectRef>
+          <a:fontRef idx="minor">
+            <a:schemeClr val="lt1"/>
+          </a:fontRef>
+        </p:style>
+        <p:txBody>
+          <a:bodyPr rtlCol="0" anchor="ctr" wrap="square"/>
+          <a:lstStyle/>
+          <a:p>
+            <a:pPr algn="ctr"/>
+            <a:r>
+              <a:rPr sz="1200" b="0" i="0">
+                <a:solidFill>
+                  <a:srgbClr val="2B2B2B"/>
+                </a:solidFill>
+                <a:latin typeface="Calibri"/>
+              </a:rPr>
+              <a:t>0.0</a:t>
+            </a:r>
+          </a:p>
+        </p:txBody>
+      </p:sp>
+      <p:sp>
+        <p:nvSpPr>
+          <p:cNvPr id="13" name="Rectangle 12"/>
+          <p:cNvSpPr/>
+          <p:nvPr/>
+        </p:nvSpPr>
+        <p:spPr>
+          <a:xfrm>
+            <a:off x="1691640" y="3035808"/>
+            <a:ext cx="1417320" cy="384048"/>
+          </a:xfrm>
+          <a:prstGeom prst="rect">
+            <a:avLst/>
+          </a:prstGeom>
+          <a:solidFill>
+            <a:srgbClr val="F4F7FB"/>
+          </a:solidFill>
+          <a:ln w="9525">
+            <a:solidFill>
+              <a:srgbClr val="D8DEE6"/>
+            </a:solidFill>
+          </a:ln>
+          <a:effectLst/>
+        </p:spPr>
+        <p:style>
+          <a:lnRef idx="1">
+            <a:schemeClr val="accent1"/>
+          </a:lnRef>
+          <a:fillRef idx="3">
+            <a:schemeClr val="accent1"/>
+          </a:fillRef>
+          <a:effectRef idx="2">
+            <a:schemeClr val="accent1"/>
+          </a:effectRef>
+          <a:fontRef idx="minor">
+            <a:schemeClr val="lt1"/>
+          </a:fontRef>
+        </p:style>
+        <p:txBody>
+          <a:bodyPr rtlCol="0" anchor="ctr" wrap="square"/>
+          <a:lstStyle/>
+          <a:p>
+            <a:pPr algn="ctr"/>
+            <a:r>
+              <a:rPr sz="1200" b="0" i="0">
+                <a:solidFill>
+                  <a:srgbClr val="2B2B2B"/>
+                </a:solidFill>
+                <a:latin typeface="Calibri"/>
+              </a:rPr>
+              <a:t>0.769</a:t>
+            </a:r>
+          </a:p>
+        </p:txBody>
+      </p:sp>
+      <p:sp>
+        <p:nvSpPr>
+          <p:cNvPr id="14" name="Rectangle 13"/>
+          <p:cNvSpPr/>
+          <p:nvPr/>
+        </p:nvSpPr>
+        <p:spPr>
+          <a:xfrm>
+            <a:off x="3108960" y="3035808"/>
+            <a:ext cx="1417320" cy="384048"/>
+          </a:xfrm>
+          <a:prstGeom prst="rect">
+            <a:avLst/>
+          </a:prstGeom>
+          <a:solidFill>
+            <a:srgbClr val="F4F7FB"/>
+          </a:solidFill>
+          <a:ln w="9525">
+            <a:solidFill>
+              <a:srgbClr val="D8DEE6"/>
+            </a:solidFill>
+          </a:ln>
+          <a:effectLst/>
+        </p:spPr>
+        <p:style>
+          <a:lnRef idx="1">
+            <a:schemeClr val="accent1"/>
+          </a:lnRef>
+          <a:fillRef idx="3">
+            <a:schemeClr val="accent1"/>
+          </a:fillRef>
+          <a:effectRef idx="2">
+            <a:schemeClr val="accent1"/>
+          </a:effectRef>
+          <a:fontRef idx="minor">
+            <a:schemeClr val="lt1"/>
+          </a:fontRef>
+        </p:style>
+        <p:txBody>
+          <a:bodyPr rtlCol="0" anchor="ctr" wrap="square"/>
+          <a:lstStyle/>
+          <a:p>
+            <a:pPr algn="ctr"/>
+            <a:r>
+              <a:rPr sz="1200" b="0" i="0">
+                <a:solidFill>
+                  <a:srgbClr val="2B2B2B"/>
+                </a:solidFill>
+                <a:latin typeface="Calibri"/>
+              </a:rPr>
+              <a:t>0.831</a:t>
+            </a:r>
+          </a:p>
+        </p:txBody>
+      </p:sp>
+      <p:sp>
+        <p:nvSpPr>
+          <p:cNvPr id="15" name="Rectangle 14"/>
+          <p:cNvSpPr/>
+          <p:nvPr/>
+        </p:nvSpPr>
+        <p:spPr>
+          <a:xfrm>
+            <a:off x="4526280" y="3035808"/>
+            <a:ext cx="1417320" cy="384048"/>
+          </a:xfrm>
+          <a:prstGeom prst="rect">
+            <a:avLst/>
+          </a:prstGeom>
+          <a:solidFill>
+            <a:srgbClr val="F4F7FB"/>
+          </a:solidFill>
+          <a:ln w="9525">
+            <a:solidFill>
+              <a:srgbClr val="D8DEE6"/>
+            </a:solidFill>
+          </a:ln>
+          <a:effectLst/>
+        </p:spPr>
+        <p:style>
+          <a:lnRef idx="1">
+            <a:schemeClr val="accent1"/>
+          </a:lnRef>
+          <a:fillRef idx="3">
+            <a:schemeClr val="accent1"/>
+          </a:fillRef>
+          <a:effectRef idx="2">
+            <a:schemeClr val="accent1"/>
+          </a:effectRef>
+          <a:fontRef idx="minor">
+            <a:schemeClr val="lt1"/>
+          </a:fontRef>
+        </p:style>
+        <p:txBody>
+          <a:bodyPr rtlCol="0" anchor="ctr" wrap="square"/>
+          <a:lstStyle/>
+          <a:p>
+            <a:pPr algn="ctr"/>
+            <a:r>
+              <a:rPr sz="1200" b="0" i="0">
+                <a:solidFill>
+                  <a:srgbClr val="2B2B2B"/>
+                </a:solidFill>
+                <a:latin typeface="Calibri"/>
+              </a:rPr>
+              <a:t>0.720</a:t>
+            </a:r>
+          </a:p>
+        </p:txBody>
+      </p:sp>
+      <p:sp>
+        <p:nvSpPr>
+          <p:cNvPr id="16" name="Rectangle 15"/>
+          <p:cNvSpPr/>
+          <p:nvPr/>
+        </p:nvSpPr>
+        <p:spPr>
+          <a:xfrm>
+            <a:off x="777240" y="3419856"/>
+            <a:ext cx="914400" cy="384048"/>
+          </a:xfrm>
+          <a:prstGeom prst="rect">
+            <a:avLst/>
+          </a:prstGeom>
+          <a:solidFill>
+            <a:srgbClr val="FFFFFF"/>
+          </a:solidFill>
+          <a:ln w="9525">
+            <a:solidFill>
+              <a:srgbClr val="D8DEE6"/>
+            </a:solidFill>
+          </a:ln>
+          <a:effectLst/>
+        </p:spPr>
+        <p:style>
+          <a:lnRef idx="1">
+            <a:schemeClr val="accent1"/>
+          </a:lnRef>
+          <a:fillRef idx="3">
+            <a:schemeClr val="accent1"/>
+          </a:fillRef>
+          <a:effectRef idx="2">
+            <a:schemeClr val="accent1"/>
+          </a:effectRef>
+          <a:fontRef idx="minor">
+            <a:schemeClr val="lt1"/>
+          </a:fontRef>
+        </p:style>
+        <p:txBody>
+          <a:bodyPr rtlCol="0" anchor="ctr" wrap="square"/>
+          <a:lstStyle/>
+          <a:p>
+            <a:pPr algn="ctr"/>
+            <a:r>
+              <a:rPr sz="1200" b="0" i="0">
+                <a:solidFill>
+                  <a:srgbClr val="2B2B2B"/>
+                </a:solidFill>
+                <a:latin typeface="Calibri"/>
+              </a:rPr>
+              <a:t>0.2</a:t>
+            </a:r>
+          </a:p>
+        </p:txBody>
+      </p:sp>
+      <p:sp>
+        <p:nvSpPr>
+          <p:cNvPr id="17" name="Rectangle 16"/>
+          <p:cNvSpPr/>
+          <p:nvPr/>
+        </p:nvSpPr>
+        <p:spPr>
+          <a:xfrm>
+            <a:off x="1691640" y="3419856"/>
+            <a:ext cx="1417320" cy="384048"/>
+          </a:xfrm>
+          <a:prstGeom prst="rect">
+            <a:avLst/>
+          </a:prstGeom>
+          <a:solidFill>
+            <a:srgbClr val="FFFFFF"/>
+          </a:solidFill>
+          <a:ln w="9525">
+            <a:solidFill>
+              <a:srgbClr val="D8DEE6"/>
+            </a:solidFill>
+          </a:ln>
+          <a:effectLst/>
+        </p:spPr>
+        <p:style>
+          <a:lnRef idx="1">
+            <a:schemeClr val="accent1"/>
+          </a:lnRef>
+          <a:fillRef idx="3">
+            <a:schemeClr val="accent1"/>
+          </a:fillRef>
+          <a:effectRef idx="2">
+            <a:schemeClr val="accent1"/>
+          </a:effectRef>
+          <a:fontRef idx="minor">
+            <a:schemeClr val="lt1"/>
+          </a:fontRef>
+        </p:style>
+        <p:txBody>
+          <a:bodyPr rtlCol="0" anchor="ctr" wrap="square"/>
+          <a:lstStyle/>
+          <a:p>
+            <a:pPr algn="ctr"/>
+            <a:r>
+              <a:rPr sz="1200" b="0" i="0">
+                <a:solidFill>
+                  <a:srgbClr val="2B2B2B"/>
+                </a:solidFill>
+                <a:latin typeface="Calibri"/>
+              </a:rPr>
+              <a:t>0.638</a:t>
+            </a:r>
+          </a:p>
+        </p:txBody>
+      </p:sp>
+      <p:sp>
+        <p:nvSpPr>
+          <p:cNvPr id="18" name="Rectangle 17"/>
+          <p:cNvSpPr/>
+          <p:nvPr/>
+        </p:nvSpPr>
+        <p:spPr>
+          <a:xfrm>
+            <a:off x="3108960" y="3419856"/>
+            <a:ext cx="1417320" cy="384048"/>
+          </a:xfrm>
+          <a:prstGeom prst="rect">
+            <a:avLst/>
+          </a:prstGeom>
+          <a:solidFill>
+            <a:srgbClr val="FFFFFF"/>
+          </a:solidFill>
+          <a:ln w="9525">
+            <a:solidFill>
+              <a:srgbClr val="D8DEE6"/>
+            </a:solidFill>
+          </a:ln>
+          <a:effectLst/>
+        </p:spPr>
+        <p:style>
+          <a:lnRef idx="1">
+            <a:schemeClr val="accent1"/>
+          </a:lnRef>
+          <a:fillRef idx="3">
+            <a:schemeClr val="accent1"/>
+          </a:fillRef>
+          <a:effectRef idx="2">
+            <a:schemeClr val="accent1"/>
+          </a:effectRef>
+          <a:fontRef idx="minor">
+            <a:schemeClr val="lt1"/>
+          </a:fontRef>
+        </p:style>
+        <p:txBody>
+          <a:bodyPr rtlCol="0" anchor="ctr" wrap="square"/>
+          <a:lstStyle/>
+          <a:p>
+            <a:pPr algn="ctr"/>
+            <a:r>
+              <a:rPr sz="1200" b="0" i="0">
+                <a:solidFill>
+                  <a:srgbClr val="2B2B2B"/>
+                </a:solidFill>
+                <a:latin typeface="Calibri"/>
+              </a:rPr>
+              <a:t>0.746</a:t>
+            </a:r>
+          </a:p>
+        </p:txBody>
+      </p:sp>
+      <p:sp>
+        <p:nvSpPr>
+          <p:cNvPr id="19" name="Rectangle 18"/>
+          <p:cNvSpPr/>
+          <p:nvPr/>
+        </p:nvSpPr>
+        <p:spPr>
+          <a:xfrm>
+            <a:off x="4526280" y="3419856"/>
+            <a:ext cx="1417320" cy="384048"/>
+          </a:xfrm>
+          <a:prstGeom prst="rect">
+            <a:avLst/>
+          </a:prstGeom>
+          <a:solidFill>
+            <a:srgbClr val="FFFFFF"/>
+          </a:solidFill>
+          <a:ln w="9525">
+            <a:solidFill>
+              <a:srgbClr val="D8DEE6"/>
+            </a:solidFill>
+          </a:ln>
+          <a:effectLst/>
+        </p:spPr>
+        <p:style>
+          <a:lnRef idx="1">
+            <a:schemeClr val="accent1"/>
+          </a:lnRef>
+          <a:fillRef idx="3">
+            <a:schemeClr val="accent1"/>
+          </a:fillRef>
+          <a:effectRef idx="2">
+            <a:schemeClr val="accent1"/>
+          </a:effectRef>
+          <a:fontRef idx="minor">
+            <a:schemeClr val="lt1"/>
+          </a:fontRef>
+        </p:style>
+        <p:txBody>
+          <a:bodyPr rtlCol="0" anchor="ctr" wrap="square"/>
+          <a:lstStyle/>
+          <a:p>
+            <a:pPr algn="ctr"/>
+            <a:r>
+              <a:rPr sz="1200" b="0" i="0">
+                <a:solidFill>
+                  <a:srgbClr val="2B2B2B"/>
+                </a:solidFill>
+                <a:latin typeface="Calibri"/>
+              </a:rPr>
+              <a:t>0.704</a:t>
+            </a:r>
+          </a:p>
+        </p:txBody>
+      </p:sp>
+      <p:sp>
+        <p:nvSpPr>
+          <p:cNvPr id="20" name="Rectangle 19"/>
+          <p:cNvSpPr/>
+          <p:nvPr/>
+        </p:nvSpPr>
+        <p:spPr>
+          <a:xfrm>
+            <a:off x="777240" y="3803904"/>
+            <a:ext cx="914400" cy="384048"/>
+          </a:xfrm>
+          <a:prstGeom prst="rect">
+            <a:avLst/>
+          </a:prstGeom>
+          <a:solidFill>
+            <a:srgbClr val="F4F7FB"/>
+          </a:solidFill>
+          <a:ln w="9525">
+            <a:solidFill>
+              <a:srgbClr val="D8DEE6"/>
+            </a:solidFill>
+          </a:ln>
+          <a:effectLst/>
+        </p:spPr>
+        <p:style>
+          <a:lnRef idx="1">
+            <a:schemeClr val="accent1"/>
+          </a:lnRef>
+          <a:fillRef idx="3">
+            <a:schemeClr val="accent1"/>
+          </a:fillRef>
+          <a:effectRef idx="2">
+            <a:schemeClr val="accent1"/>
+          </a:effectRef>
+          <a:fontRef idx="minor">
+            <a:schemeClr val="lt1"/>
+          </a:fontRef>
+        </p:style>
+        <p:txBody>
+          <a:bodyPr rtlCol="0" anchor="ctr" wrap="square"/>
+          <a:lstStyle/>
+          <a:p>
+            <a:pPr algn="ctr"/>
+            <a:r>
+              <a:rPr sz="1200" b="0" i="0">
+                <a:solidFill>
+                  <a:srgbClr val="2B2B2B"/>
+                </a:solidFill>
+                <a:latin typeface="Calibri"/>
+              </a:rPr>
+              <a:t>0.3</a:t>
+            </a:r>
+          </a:p>
+        </p:txBody>
+      </p:sp>
+      <p:sp>
+        <p:nvSpPr>
+          <p:cNvPr id="21" name="Rectangle 20"/>
+          <p:cNvSpPr/>
+          <p:nvPr/>
+        </p:nvSpPr>
+        <p:spPr>
+          <a:xfrm>
+            <a:off x="1691640" y="3803904"/>
+            <a:ext cx="1417320" cy="384048"/>
+          </a:xfrm>
+          <a:prstGeom prst="rect">
+            <a:avLst/>
+          </a:prstGeom>
+          <a:solidFill>
+            <a:srgbClr val="F4F7FB"/>
+          </a:solidFill>
+          <a:ln w="9525">
+            <a:solidFill>
+              <a:srgbClr val="D8DEE6"/>
+            </a:solidFill>
+          </a:ln>
+          <a:effectLst/>
+        </p:spPr>
+        <p:style>
+          <a:lnRef idx="1">
+            <a:schemeClr val="accent1"/>
+          </a:lnRef>
+          <a:fillRef idx="3">
+            <a:schemeClr val="accent1"/>
+          </a:fillRef>
+          <a:effectRef idx="2">
+            <a:schemeClr val="accent1"/>
+          </a:effectRef>
+          <a:fontRef idx="minor">
+            <a:schemeClr val="lt1"/>
+          </a:fontRef>
+        </p:style>
+        <p:txBody>
+          <a:bodyPr rtlCol="0" anchor="ctr" wrap="square"/>
+          <a:lstStyle/>
+          <a:p>
+            <a:pPr algn="ctr"/>
+            <a:r>
+              <a:rPr sz="1200" b="0" i="0">
+                <a:solidFill>
+                  <a:srgbClr val="2B2B2B"/>
+                </a:solidFill>
+                <a:latin typeface="Calibri"/>
+              </a:rPr>
+              <a:t>0.647</a:t>
+            </a:r>
+          </a:p>
+        </p:txBody>
+      </p:sp>
+      <p:sp>
+        <p:nvSpPr>
+          <p:cNvPr id="22" name="Rectangle 21"/>
+          <p:cNvSpPr/>
+          <p:nvPr/>
+        </p:nvSpPr>
+        <p:spPr>
+          <a:xfrm>
+            <a:off x="3108960" y="3803904"/>
+            <a:ext cx="1417320" cy="384048"/>
+          </a:xfrm>
+          <a:prstGeom prst="rect">
+            <a:avLst/>
+          </a:prstGeom>
+          <a:solidFill>
+            <a:srgbClr val="F4F7FB"/>
+          </a:solidFill>
+          <a:ln w="9525">
+            <a:solidFill>
+              <a:srgbClr val="D8DEE6"/>
+            </a:solidFill>
+          </a:ln>
+          <a:effectLst/>
+        </p:spPr>
+        <p:style>
+          <a:lnRef idx="1">
+            <a:schemeClr val="accent1"/>
+          </a:lnRef>
+          <a:fillRef idx="3">
+            <a:schemeClr val="accent1"/>
+          </a:fillRef>
+          <a:effectRef idx="2">
+            <a:schemeClr val="accent1"/>
+          </a:effectRef>
+          <a:fontRef idx="minor">
+            <a:schemeClr val="lt1"/>
+          </a:fontRef>
+        </p:style>
+        <p:txBody>
+          <a:bodyPr rtlCol="0" anchor="ctr" wrap="square"/>
+          <a:lstStyle/>
+          <a:p>
+            <a:pPr algn="ctr"/>
+            <a:r>
+              <a:rPr sz="1200" b="0" i="0">
+                <a:solidFill>
+                  <a:srgbClr val="2B2B2B"/>
+                </a:solidFill>
+                <a:latin typeface="Calibri"/>
+              </a:rPr>
+              <a:t>0.712</a:t>
+            </a:r>
+          </a:p>
+        </p:txBody>
+      </p:sp>
+      <p:sp>
+        <p:nvSpPr>
+          <p:cNvPr id="23" name="Rectangle 22"/>
+          <p:cNvSpPr/>
+          <p:nvPr/>
+        </p:nvSpPr>
+        <p:spPr>
+          <a:xfrm>
+            <a:off x="4526280" y="3803904"/>
+            <a:ext cx="1417320" cy="384048"/>
+          </a:xfrm>
+          <a:prstGeom prst="rect">
+            <a:avLst/>
+          </a:prstGeom>
+          <a:solidFill>
+            <a:srgbClr val="F4F7FB"/>
+          </a:solidFill>
+          <a:ln w="9525">
+            <a:solidFill>
+              <a:srgbClr val="D8DEE6"/>
+            </a:solidFill>
+          </a:ln>
+          <a:effectLst/>
+        </p:spPr>
+        <p:style>
+          <a:lnRef idx="1">
+            <a:schemeClr val="accent1"/>
+          </a:lnRef>
+          <a:fillRef idx="3">
+            <a:schemeClr val="accent1"/>
+          </a:fillRef>
+          <a:effectRef idx="2">
+            <a:schemeClr val="accent1"/>
+          </a:effectRef>
+          <a:fontRef idx="minor">
+            <a:schemeClr val="lt1"/>
+          </a:fontRef>
+        </p:style>
+        <p:txBody>
+          <a:bodyPr rtlCol="0" anchor="ctr" wrap="square"/>
+          <a:lstStyle/>
+          <a:p>
+            <a:pPr algn="ctr"/>
+            <a:r>
+              <a:rPr sz="1200" b="0" i="0">
+                <a:solidFill>
+                  <a:srgbClr val="2B2B2B"/>
+                </a:solidFill>
+                <a:latin typeface="Calibri"/>
+              </a:rPr>
+              <a:t>0.713</a:t>
+            </a:r>
+          </a:p>
+        </p:txBody>
+      </p:sp>
+      <p:sp>
+        <p:nvSpPr>
+          <p:cNvPr id="24" name="Rectangle 23"/>
+          <p:cNvSpPr/>
+          <p:nvPr/>
+        </p:nvSpPr>
+        <p:spPr>
+          <a:xfrm>
+            <a:off x="777240" y="4187952"/>
+            <a:ext cx="914400" cy="384048"/>
+          </a:xfrm>
+          <a:prstGeom prst="rect">
+            <a:avLst/>
+          </a:prstGeom>
+          <a:solidFill>
+            <a:srgbClr val="FFFFFF"/>
+          </a:solidFill>
+          <a:ln w="9525">
+            <a:solidFill>
+              <a:srgbClr val="D8DEE6"/>
+            </a:solidFill>
+          </a:ln>
+          <a:effectLst/>
+        </p:spPr>
+        <p:style>
+          <a:lnRef idx="1">
+            <a:schemeClr val="accent1"/>
+          </a:lnRef>
+          <a:fillRef idx="3">
+            <a:schemeClr val="accent1"/>
+          </a:fillRef>
+          <a:effectRef idx="2">
+            <a:schemeClr val="accent1"/>
+          </a:effectRef>
+          <a:fontRef idx="minor">
+            <a:schemeClr val="lt1"/>
+          </a:fontRef>
+        </p:style>
+        <p:txBody>
+          <a:bodyPr rtlCol="0" anchor="ctr" wrap="square"/>
+          <a:lstStyle/>
+          <a:p>
+            <a:pPr algn="ctr"/>
+            <a:r>
+              <a:rPr sz="1200" b="0" i="0">
+                <a:solidFill>
+                  <a:srgbClr val="2B2B2B"/>
+                </a:solidFill>
+                <a:latin typeface="Calibri"/>
+              </a:rPr>
+              <a:t>0.5</a:t>
+            </a:r>
+          </a:p>
+        </p:txBody>
+      </p:sp>
+      <p:sp>
+        <p:nvSpPr>
+          <p:cNvPr id="25" name="Rectangle 24"/>
+          <p:cNvSpPr/>
+          <p:nvPr/>
+        </p:nvSpPr>
+        <p:spPr>
+          <a:xfrm>
+            <a:off x="1691640" y="4187952"/>
+            <a:ext cx="1417320" cy="384048"/>
+          </a:xfrm>
+          <a:prstGeom prst="rect">
+            <a:avLst/>
+          </a:prstGeom>
+          <a:solidFill>
+            <a:srgbClr val="FFFFFF"/>
+          </a:solidFill>
+          <a:ln w="9525">
+            <a:solidFill>
+              <a:srgbClr val="D8DEE6"/>
+            </a:solidFill>
+          </a:ln>
+          <a:effectLst/>
+        </p:spPr>
+        <p:style>
+          <a:lnRef idx="1">
+            <a:schemeClr val="accent1"/>
+          </a:lnRef>
+          <a:fillRef idx="3">
+            <a:schemeClr val="accent1"/>
+          </a:fillRef>
+          <a:effectRef idx="2">
+            <a:schemeClr val="accent1"/>
+          </a:effectRef>
+          <a:fontRef idx="minor">
+            <a:schemeClr val="lt1"/>
+          </a:fontRef>
+        </p:style>
+        <p:txBody>
+          <a:bodyPr rtlCol="0" anchor="ctr" wrap="square"/>
+          <a:lstStyle/>
+          <a:p>
+            <a:pPr algn="ctr"/>
+            <a:r>
+              <a:rPr sz="1200" b="0" i="0">
+                <a:solidFill>
+                  <a:srgbClr val="2B2B2B"/>
+                </a:solidFill>
+                <a:latin typeface="Calibri"/>
+              </a:rPr>
+              <a:t>0.534</a:t>
+            </a:r>
+          </a:p>
+        </p:txBody>
+      </p:sp>
+      <p:sp>
+        <p:nvSpPr>
+          <p:cNvPr id="26" name="Rectangle 25"/>
+          <p:cNvSpPr/>
+          <p:nvPr/>
+        </p:nvSpPr>
+        <p:spPr>
+          <a:xfrm>
+            <a:off x="3108960" y="4187952"/>
+            <a:ext cx="1417320" cy="384048"/>
+          </a:xfrm>
+          <a:prstGeom prst="rect">
+            <a:avLst/>
+          </a:prstGeom>
+          <a:solidFill>
+            <a:srgbClr val="FFFFFF"/>
+          </a:solidFill>
+          <a:ln w="9525">
+            <a:solidFill>
+              <a:srgbClr val="D8DEE6"/>
+            </a:solidFill>
+          </a:ln>
+          <a:effectLst/>
+        </p:spPr>
+        <p:style>
+          <a:lnRef idx="1">
+            <a:schemeClr val="accent1"/>
+          </a:lnRef>
+          <a:fillRef idx="3">
+            <a:schemeClr val="accent1"/>
+          </a:fillRef>
+          <a:effectRef idx="2">
+            <a:schemeClr val="accent1"/>
+          </a:effectRef>
+          <a:fontRef idx="minor">
+            <a:schemeClr val="lt1"/>
+          </a:fontRef>
+        </p:style>
+        <p:txBody>
+          <a:bodyPr rtlCol="0" anchor="ctr" wrap="square"/>
+          <a:lstStyle/>
+          <a:p>
+            <a:pPr algn="ctr"/>
+            <a:r>
+              <a:rPr sz="1200" b="0" i="0">
+                <a:solidFill>
+                  <a:srgbClr val="2B2B2B"/>
+                </a:solidFill>
+                <a:latin typeface="Calibri"/>
+              </a:rPr>
+              <a:t>0.616</a:t>
+            </a:r>
+          </a:p>
+        </p:txBody>
+      </p:sp>
+      <p:sp>
+        <p:nvSpPr>
+          <p:cNvPr id="27" name="Rectangle 26"/>
+          <p:cNvSpPr/>
+          <p:nvPr/>
+        </p:nvSpPr>
+        <p:spPr>
+          <a:xfrm>
+            <a:off x="4526280" y="4187952"/>
+            <a:ext cx="1417320" cy="384048"/>
+          </a:xfrm>
+          <a:prstGeom prst="rect">
+            <a:avLst/>
+          </a:prstGeom>
+          <a:solidFill>
+            <a:srgbClr val="FFFFFF"/>
+          </a:solidFill>
+          <a:ln w="9525">
+            <a:solidFill>
+              <a:srgbClr val="D8DEE6"/>
+            </a:solidFill>
+          </a:ln>
+          <a:effectLst/>
+        </p:spPr>
+        <p:style>
+          <a:lnRef idx="1">
+            <a:schemeClr val="accent1"/>
+          </a:lnRef>
+          <a:fillRef idx="3">
+            <a:schemeClr val="accent1"/>
+          </a:fillRef>
+          <a:effectRef idx="2">
+            <a:schemeClr val="accent1"/>
+          </a:effectRef>
+          <a:fontRef idx="minor">
+            <a:schemeClr val="lt1"/>
+          </a:fontRef>
+        </p:style>
+        <p:txBody>
+          <a:bodyPr rtlCol="0" anchor="ctr" wrap="square"/>
+          <a:lstStyle/>
+          <a:p>
+            <a:pPr algn="ctr"/>
+            <a:r>
+              <a:rPr sz="1200" b="0" i="0">
+                <a:solidFill>
+                  <a:srgbClr val="2B2B2B"/>
+                </a:solidFill>
+                <a:latin typeface="Calibri"/>
+              </a:rPr>
+              <a:t>0.723</a:t>
+            </a:r>
+          </a:p>
+        </p:txBody>
+      </p:sp>
+      <p:sp>
+        <p:nvSpPr>
+          <p:cNvPr id="28" name="Rectangle 27"/>
+          <p:cNvSpPr/>
+          <p:nvPr/>
+        </p:nvSpPr>
+        <p:spPr>
+          <a:xfrm>
+            <a:off x="777240" y="4572000"/>
+            <a:ext cx="914400" cy="384048"/>
+          </a:xfrm>
+          <a:prstGeom prst="rect">
+            <a:avLst/>
+          </a:prstGeom>
+          <a:solidFill>
+            <a:srgbClr val="F4F7FB"/>
+          </a:solidFill>
+          <a:ln w="9525">
+            <a:solidFill>
+              <a:srgbClr val="D8DEE6"/>
+            </a:solidFill>
+          </a:ln>
+          <a:effectLst/>
+        </p:spPr>
+        <p:style>
+          <a:lnRef idx="1">
+            <a:schemeClr val="accent1"/>
+          </a:lnRef>
+          <a:fillRef idx="3">
+            <a:schemeClr val="accent1"/>
+          </a:fillRef>
+          <a:effectRef idx="2">
+            <a:schemeClr val="accent1"/>
+          </a:effectRef>
+          <a:fontRef idx="minor">
+            <a:schemeClr val="lt1"/>
+          </a:fontRef>
+        </p:style>
+        <p:txBody>
+          <a:bodyPr rtlCol="0" anchor="ctr" wrap="square"/>
+          <a:lstStyle/>
+          <a:p>
+            <a:pPr algn="ctr"/>
+            <a:r>
+              <a:rPr sz="1200" b="0" i="0">
+                <a:solidFill>
+                  <a:srgbClr val="2B2B2B"/>
+                </a:solidFill>
+                <a:latin typeface="Calibri"/>
+              </a:rPr>
+              <a:t>0.7</a:t>
+            </a:r>
+          </a:p>
+        </p:txBody>
+      </p:sp>
+      <p:sp>
+        <p:nvSpPr>
+          <p:cNvPr id="29" name="Rectangle 28"/>
+          <p:cNvSpPr/>
+          <p:nvPr/>
+        </p:nvSpPr>
+        <p:spPr>
+          <a:xfrm>
+            <a:off x="1691640" y="4572000"/>
+            <a:ext cx="1417320" cy="384048"/>
+          </a:xfrm>
+          <a:prstGeom prst="rect">
+            <a:avLst/>
+          </a:prstGeom>
+          <a:solidFill>
+            <a:srgbClr val="F4F7FB"/>
+          </a:solidFill>
+          <a:ln w="9525">
+            <a:solidFill>
+              <a:srgbClr val="D8DEE6"/>
+            </a:solidFill>
+          </a:ln>
+          <a:effectLst/>
+        </p:spPr>
+        <p:style>
+          <a:lnRef idx="1">
+            <a:schemeClr val="accent1"/>
+          </a:lnRef>
+          <a:fillRef idx="3">
+            <a:schemeClr val="accent1"/>
+          </a:fillRef>
+          <a:effectRef idx="2">
+            <a:schemeClr val="accent1"/>
+          </a:effectRef>
+          <a:fontRef idx="minor">
+            <a:schemeClr val="lt1"/>
+          </a:fontRef>
+        </p:style>
+        <p:txBody>
+          <a:bodyPr rtlCol="0" anchor="ctr" wrap="square"/>
+          <a:lstStyle/>
+          <a:p>
+            <a:pPr algn="ctr"/>
+            <a:r>
+              <a:rPr sz="1200" b="0" i="0">
+                <a:solidFill>
+                  <a:srgbClr val="2B2B2B"/>
+                </a:solidFill>
+                <a:latin typeface="Calibri"/>
+              </a:rPr>
+              <a:t>0.407</a:t>
+            </a:r>
+          </a:p>
+        </p:txBody>
+      </p:sp>
+      <p:sp>
+        <p:nvSpPr>
+          <p:cNvPr id="30" name="Rectangle 29"/>
+          <p:cNvSpPr/>
+          <p:nvPr/>
+        </p:nvSpPr>
+        <p:spPr>
+          <a:xfrm>
+            <a:off x="3108960" y="4572000"/>
+            <a:ext cx="1417320" cy="384048"/>
+          </a:xfrm>
+          <a:prstGeom prst="rect">
+            <a:avLst/>
+          </a:prstGeom>
+          <a:solidFill>
+            <a:srgbClr val="F4F7FB"/>
+          </a:solidFill>
+          <a:ln w="9525">
+            <a:solidFill>
+              <a:srgbClr val="D8DEE6"/>
+            </a:solidFill>
+          </a:ln>
+          <a:effectLst/>
+        </p:spPr>
+        <p:style>
+          <a:lnRef idx="1">
+            <a:schemeClr val="accent1"/>
+          </a:lnRef>
+          <a:fillRef idx="3">
+            <a:schemeClr val="accent1"/>
+          </a:fillRef>
+          <a:effectRef idx="2">
+            <a:schemeClr val="accent1"/>
+          </a:effectRef>
+          <a:fontRef idx="minor">
+            <a:schemeClr val="lt1"/>
+          </a:fontRef>
+        </p:style>
+        <p:txBody>
+          <a:bodyPr rtlCol="0" anchor="ctr" wrap="square"/>
+          <a:lstStyle/>
+          <a:p>
+            <a:pPr algn="ctr"/>
+            <a:r>
+              <a:rPr sz="1200" b="0" i="0">
+                <a:solidFill>
+                  <a:srgbClr val="2B2B2B"/>
+                </a:solidFill>
+                <a:latin typeface="Calibri"/>
+              </a:rPr>
+              <a:t>0.511</a:t>
+            </a:r>
+          </a:p>
+        </p:txBody>
+      </p:sp>
+      <p:sp>
+        <p:nvSpPr>
+          <p:cNvPr id="31" name="Rectangle 30"/>
+          <p:cNvSpPr/>
+          <p:nvPr/>
+        </p:nvSpPr>
+        <p:spPr>
+          <a:xfrm>
+            <a:off x="4526280" y="4572000"/>
+            <a:ext cx="1417320" cy="384048"/>
+          </a:xfrm>
+          <a:prstGeom prst="rect">
+            <a:avLst/>
+          </a:prstGeom>
+          <a:solidFill>
+            <a:srgbClr val="F4F7FB"/>
+          </a:solidFill>
+          <a:ln w="9525">
+            <a:solidFill>
+              <a:srgbClr val="D8DEE6"/>
+            </a:solidFill>
+          </a:ln>
+          <a:effectLst/>
+        </p:spPr>
+        <p:style>
+          <a:lnRef idx="1">
+            <a:schemeClr val="accent1"/>
+          </a:lnRef>
+          <a:fillRef idx="3">
+            <a:schemeClr val="accent1"/>
+          </a:fillRef>
+          <a:effectRef idx="2">
+            <a:schemeClr val="accent1"/>
+          </a:effectRef>
+          <a:fontRef idx="minor">
+            <a:schemeClr val="lt1"/>
+          </a:fontRef>
+        </p:style>
+        <p:txBody>
+          <a:bodyPr rtlCol="0" anchor="ctr" wrap="square"/>
+          <a:lstStyle/>
+          <a:p>
+            <a:pPr algn="ctr"/>
+            <a:r>
+              <a:rPr sz="1200" b="0" i="0">
+                <a:solidFill>
+                  <a:srgbClr val="2B2B2B"/>
+                </a:solidFill>
+                <a:latin typeface="Calibri"/>
+              </a:rPr>
+              <a:t>0.728</a:t>
+            </a:r>
+          </a:p>
+        </p:txBody>
+      </p:sp>
+      <p:sp>
+        <p:nvSpPr>
+          <p:cNvPr id="32" name="Rectangle 31"/>
+          <p:cNvSpPr/>
+          <p:nvPr/>
+        </p:nvSpPr>
+        <p:spPr>
+          <a:xfrm>
+            <a:off x="777240" y="4956048"/>
+            <a:ext cx="914400" cy="384048"/>
+          </a:xfrm>
+          <a:prstGeom prst="rect">
+            <a:avLst/>
+          </a:prstGeom>
+          <a:solidFill>
+            <a:srgbClr val="FFFFFF"/>
+          </a:solidFill>
+          <a:ln w="9525">
+            <a:solidFill>
+              <a:srgbClr val="D8DEE6"/>
+            </a:solidFill>
+          </a:ln>
+          <a:effectLst/>
+        </p:spPr>
+        <p:style>
+          <a:lnRef idx="1">
+            <a:schemeClr val="accent1"/>
+          </a:lnRef>
+          <a:fillRef idx="3">
+            <a:schemeClr val="accent1"/>
+          </a:fillRef>
+          <a:effectRef idx="2">
+            <a:schemeClr val="accent1"/>
+          </a:effectRef>
+          <a:fontRef idx="minor">
+            <a:schemeClr val="lt1"/>
+          </a:fontRef>
+        </p:style>
+        <p:txBody>
+          <a:bodyPr rtlCol="0" anchor="ctr" wrap="square"/>
+          <a:lstStyle/>
+          <a:p>
+            <a:pPr algn="ctr"/>
+            <a:r>
+              <a:rPr sz="1200" b="0" i="0">
+                <a:solidFill>
+                  <a:srgbClr val="2B2B2B"/>
+                </a:solidFill>
+                <a:latin typeface="Calibri"/>
+              </a:rPr>
+              <a:t>1.0</a:t>
+            </a:r>
+          </a:p>
+        </p:txBody>
+      </p:sp>
+      <p:sp>
+        <p:nvSpPr>
+          <p:cNvPr id="33" name="Rectangle 32"/>
+          <p:cNvSpPr/>
+          <p:nvPr/>
+        </p:nvSpPr>
+        <p:spPr>
+          <a:xfrm>
+            <a:off x="1691640" y="4956048"/>
+            <a:ext cx="1417320" cy="384048"/>
+          </a:xfrm>
+          <a:prstGeom prst="rect">
+            <a:avLst/>
+          </a:prstGeom>
+          <a:solidFill>
+            <a:srgbClr val="FFFFFF"/>
+          </a:solidFill>
+          <a:ln w="9525">
+            <a:solidFill>
+              <a:srgbClr val="D8DEE6"/>
+            </a:solidFill>
+          </a:ln>
+          <a:effectLst/>
+        </p:spPr>
+        <p:style>
+          <a:lnRef idx="1">
+            <a:schemeClr val="accent1"/>
+          </a:lnRef>
+          <a:fillRef idx="3">
+            <a:schemeClr val="accent1"/>
+          </a:fillRef>
+          <a:effectRef idx="2">
+            <a:schemeClr val="accent1"/>
+          </a:effectRef>
+          <a:fontRef idx="minor">
+            <a:schemeClr val="lt1"/>
+          </a:fontRef>
+        </p:style>
+        <p:txBody>
+          <a:bodyPr rtlCol="0" anchor="ctr" wrap="square"/>
+          <a:lstStyle/>
+          <a:p>
+            <a:pPr algn="ctr"/>
+            <a:r>
+              <a:rPr sz="1200" b="0" i="0">
+                <a:solidFill>
+                  <a:srgbClr val="2B2B2B"/>
+                </a:solidFill>
+                <a:latin typeface="Calibri"/>
+              </a:rPr>
+              <a:t>0.218</a:t>
+            </a:r>
+          </a:p>
+        </p:txBody>
+      </p:sp>
+      <p:sp>
+        <p:nvSpPr>
+          <p:cNvPr id="34" name="Rectangle 33"/>
+          <p:cNvSpPr/>
+          <p:nvPr/>
+        </p:nvSpPr>
+        <p:spPr>
+          <a:xfrm>
+            <a:off x="3108960" y="4956048"/>
+            <a:ext cx="1417320" cy="384048"/>
+          </a:xfrm>
+          <a:prstGeom prst="rect">
+            <a:avLst/>
+          </a:prstGeom>
+          <a:solidFill>
+            <a:srgbClr val="FFFFFF"/>
+          </a:solidFill>
+          <a:ln w="9525">
+            <a:solidFill>
+              <a:srgbClr val="D8DEE6"/>
+            </a:solidFill>
+          </a:ln>
+          <a:effectLst/>
+        </p:spPr>
+        <p:style>
+          <a:lnRef idx="1">
+            <a:schemeClr val="accent1"/>
+          </a:lnRef>
+          <a:fillRef idx="3">
+            <a:schemeClr val="accent1"/>
+          </a:fillRef>
+          <a:effectRef idx="2">
+            <a:schemeClr val="accent1"/>
+          </a:effectRef>
+          <a:fontRef idx="minor">
+            <a:schemeClr val="lt1"/>
+          </a:fontRef>
+        </p:style>
+        <p:txBody>
+          <a:bodyPr rtlCol="0" anchor="ctr" wrap="square"/>
+          <a:lstStyle/>
+          <a:p>
+            <a:pPr algn="ctr"/>
+            <a:r>
+              <a:rPr sz="1200" b="0" i="0">
+                <a:solidFill>
+                  <a:srgbClr val="2B2B2B"/>
+                </a:solidFill>
+                <a:latin typeface="Calibri"/>
+              </a:rPr>
+              <a:t>0.305</a:t>
+            </a:r>
+          </a:p>
+        </p:txBody>
+      </p:sp>
+      <p:sp>
+        <p:nvSpPr>
+          <p:cNvPr id="35" name="Rectangle 34"/>
+          <p:cNvSpPr/>
+          <p:nvPr/>
+        </p:nvSpPr>
+        <p:spPr>
+          <a:xfrm>
+            <a:off x="4526280" y="4956048"/>
+            <a:ext cx="1417320" cy="384048"/>
+          </a:xfrm>
+          <a:prstGeom prst="rect">
+            <a:avLst/>
+          </a:prstGeom>
+          <a:solidFill>
+            <a:srgbClr val="FFFFFF"/>
+          </a:solidFill>
+          <a:ln w="9525">
+            <a:solidFill>
+              <a:srgbClr val="D8DEE6"/>
+            </a:solidFill>
+          </a:ln>
+          <a:effectLst/>
+        </p:spPr>
+        <p:style>
+          <a:lnRef idx="1">
+            <a:schemeClr val="accent1"/>
+          </a:lnRef>
+          <a:fillRef idx="3">
+            <a:schemeClr val="accent1"/>
+          </a:fillRef>
+          <a:effectRef idx="2">
+            <a:schemeClr val="accent1"/>
+          </a:effectRef>
+          <a:fontRef idx="minor">
+            <a:schemeClr val="lt1"/>
+          </a:fontRef>
+        </p:style>
+        <p:txBody>
+          <a:bodyPr rtlCol="0" anchor="ctr" wrap="square"/>
+          <a:lstStyle/>
+          <a:p>
+            <a:pPr algn="ctr"/>
+            <a:r>
+              <a:rPr sz="1200" b="0" i="0">
+                <a:solidFill>
+                  <a:srgbClr val="2B2B2B"/>
+                </a:solidFill>
+                <a:latin typeface="Calibri"/>
+              </a:rPr>
+              <a:t>0.727</a:t>
+            </a:r>
+          </a:p>
+        </p:txBody>
+      </p:sp>
+      <p:sp>
+        <p:nvSpPr>
+          <p:cNvPr id="36" name="TextBox 35"/>
+          <p:cNvSpPr txBox="1"/>
+          <p:nvPr/>
+        </p:nvSpPr>
+        <p:spPr>
+          <a:xfrm>
+            <a:off x="6217920" y="2651760"/>
+            <a:ext cx="5196535" cy="3566160"/>
+          </a:xfrm>
+          <a:prstGeom prst="rect">
+            <a:avLst/>
+          </a:prstGeom>
+          <a:noFill/>
+        </p:spPr>
+        <p:txBody>
+          <a:bodyPr wrap="square" anchor="t" lIns="0" rIns="0" tIns="0" bIns="0">
+            <a:spAutoFit/>
+          </a:bodyPr>
+          <a:lstStyle/>
+          <a:p>
+            <a:pPr>
+              <a:spcBef>
+                <a:spcPts val="0"/>
+              </a:spcBef>
+              <a:spcAft>
+                <a:spcPts val="900"/>
+              </a:spcAft>
+            </a:pPr>
+            <a:r>
+              <a:rPr sz="1300" b="0" i="0">
+                <a:solidFill>
+                  <a:srgbClr val="2B2B2B"/>
+                </a:solidFill>
+                <a:latin typeface="Calibri"/>
+              </a:rPr>
+              <a:t>corr(θ, damage) = </a:t>
+            </a:r>
+            <a:r>
+              <a:rPr sz="1300" b="1" i="0">
+                <a:solidFill>
+                  <a:srgbClr val="2B2B2B"/>
+                </a:solidFill>
+                <a:latin typeface="Calibri"/>
+              </a:rPr>
+              <a:t>−0.991</a:t>
+            </a:r>
+            <a:r>
+              <a:rPr sz="1300" b="0" i="0">
+                <a:solidFill>
+                  <a:srgbClr val="2B2B2B"/>
+                </a:solidFill>
+                <a:latin typeface="Calibri"/>
+              </a:rPr>
+              <a:t> over the 11 per-θ means (</a:t>
+            </a:r>
+            <a:r>
+              <a:rPr sz="1300" b="1" i="0">
+                <a:solidFill>
+                  <a:srgbClr val="2B2B2B"/>
+                </a:solidFill>
+                <a:latin typeface="Calibri"/>
+              </a:rPr>
+              <a:t>−0.790</a:t>
+            </a:r>
+            <a:r>
+              <a:rPr sz="1300" b="0" i="0">
+                <a:solidFill>
+                  <a:srgbClr val="2B2B2B"/>
+                </a:solidFill>
+                <a:latin typeface="Calibri"/>
+              </a:rPr>
+              <a:t> over all 33 runs).</a:t>
+            </a:r>
+          </a:p>
+          <a:p>
+            <a:pPr>
+              <a:spcBef>
+                <a:spcPts val="0"/>
+              </a:spcBef>
+              <a:spcAft>
+                <a:spcPts val="900"/>
+              </a:spcAft>
+            </a:pPr>
+            <a:r>
+              <a:rPr sz="1300" b="0" i="0">
+                <a:solidFill>
+                  <a:srgbClr val="2B2B2B"/>
+                </a:solidFill>
+                <a:latin typeface="Calibri"/>
+              </a:rPr>
+              <a:t>corr(M, damage) = </a:t>
+            </a:r>
+            <a:r>
+              <a:rPr sz="1300" b="1" i="0">
+                <a:solidFill>
+                  <a:srgbClr val="2B2B2B"/>
+                </a:solidFill>
+                <a:latin typeface="Calibri"/>
+              </a:rPr>
+              <a:t>−0.608</a:t>
+            </a:r>
+            <a:r>
+              <a:rPr sz="1300" b="0" i="0">
+                <a:solidFill>
+                  <a:srgbClr val="2B2B2B"/>
+                </a:solidFill>
+                <a:latin typeface="Calibri"/>
+              </a:rPr>
+              <a:t> over per-θ means but </a:t>
+            </a:r>
+            <a:r>
+              <a:rPr sz="1300" b="1" i="0">
+                <a:solidFill>
+                  <a:srgbClr val="2B2B2B"/>
+                </a:solidFill>
+                <a:latin typeface="Calibri"/>
+              </a:rPr>
+              <a:t>+0.174</a:t>
+            </a:r>
+            <a:r>
+              <a:rPr sz="1300" b="0" i="0">
+                <a:solidFill>
+                  <a:srgbClr val="2B2B2B"/>
+                </a:solidFill>
+                <a:latin typeface="Calibri"/>
+              </a:rPr>
+              <a:t> over all 33 runs — the sign flips. That is noise on a flat metric, not a relationship.</a:t>
+            </a:r>
+          </a:p>
+          <a:p>
+            <a:pPr>
+              <a:spcBef>
+                <a:spcPts val="0"/>
+              </a:spcBef>
+              <a:spcAft>
+                <a:spcPts val="900"/>
+              </a:spcAft>
+            </a:pPr>
+            <a:r>
+              <a:rPr sz="1300" b="0" i="0">
+                <a:solidFill>
+                  <a:srgbClr val="2B2B2B"/>
+                </a:solidFill>
+                <a:latin typeface="Calibri"/>
+              </a:rPr>
+              <a:t>The averaging arm (D average) sits </a:t>
+            </a:r>
+            <a:r>
+              <a:rPr sz="1300" b="1" i="0">
+                <a:solidFill>
+                  <a:srgbClr val="2B2B2B"/>
+                </a:solidFill>
+                <a:latin typeface="Calibri"/>
+              </a:rPr>
+              <a:t>above</a:t>
+            </a:r>
+            <a:r>
+              <a:rPr sz="1300" b="0" i="0">
+                <a:solidFill>
+                  <a:srgbClr val="2B2B2B"/>
+                </a:solidFill>
+                <a:latin typeface="Calibri"/>
+              </a:rPr>
+              <a:t> concat at every θ — worse in 33 of 33 runs — and it is not flat either: it falls with θ too, just from a higher floor.</a:t>
+            </a:r>
+          </a:p>
           <a:p>
             <a:pPr>
               <a:spcBef>
@@ -8864,331 +10827,13 @@
               </a:spcAft>
             </a:pPr>
             <a:r>
-              <a:rPr sz="1200" b="1" i="0">
+              <a:rPr sz="1300" b="1" i="0">
                 <a:solidFill>
                   <a:srgbClr val="D97A0B"/>
                 </a:solidFill>
                 <a:latin typeface="Calibri"/>
               </a:rPr>
-              <a:t>[ FILL AFTER SWEEP — structure fixed, numbers pending ]</a:t>
-            </a:r>
-          </a:p>
-        </p:txBody>
-      </p:sp>
-      <p:sp>
-        <p:nvSpPr>
-          <p:cNvPr id="6" name="TextBox 5"/>
-          <p:cNvSpPr txBox="1"/>
-          <p:nvPr/>
-        </p:nvSpPr>
-        <p:spPr>
-          <a:xfrm>
-            <a:off x="777240" y="2377440"/>
-            <a:ext cx="10637215" cy="3749039"/>
-          </a:xfrm>
-          <a:prstGeom prst="rect">
-            <a:avLst/>
-          </a:prstGeom>
-          <a:noFill/>
-        </p:spPr>
-        <p:txBody>
-          <a:bodyPr wrap="square" anchor="t" lIns="0" rIns="0" tIns="0" bIns="0">
-            <a:spAutoFit/>
-          </a:bodyPr>
-          <a:lstStyle/>
-          <a:p/>
-        </p:txBody>
-      </p:sp>
-      <p:sp>
-        <p:nvSpPr>
-          <p:cNvPr id="7" name="TextBox 6"/>
-          <p:cNvSpPr txBox="1"/>
-          <p:nvPr/>
-        </p:nvSpPr>
-        <p:spPr>
-          <a:xfrm>
-            <a:off x="777240" y="6355080"/>
-            <a:ext cx="10637215" cy="320040"/>
-          </a:xfrm>
-          <a:prstGeom prst="rect">
-            <a:avLst/>
-          </a:prstGeom>
-          <a:noFill/>
-        </p:spPr>
-        <p:txBody>
-          <a:bodyPr wrap="square" anchor="t" lIns="0" rIns="0" tIns="0" bIns="0">
-            <a:spAutoFit/>
-          </a:bodyPr>
-          <a:lstStyle/>
-          <a:p>
-            <a:r>
-              <a:rPr sz="1000" b="0" i="1">
-                <a:solidFill>
-                  <a:srgbClr val="707A8A"/>
-                </a:solidFill>
-                <a:latin typeface="Calibri"/>
-              </a:rPr>
-              <a:t>Technical correctness (25) + interactive substrate (15)</a:t>
-            </a:r>
-          </a:p>
-        </p:txBody>
-      </p:sp>
-      <p:sp>
-        <p:nvSpPr>
-          <p:cNvPr id="8" name="TextBox 7"/>
-          <p:cNvSpPr txBox="1"/>
-          <p:nvPr/>
-        </p:nvSpPr>
-        <p:spPr>
-          <a:xfrm>
-            <a:off x="10865815" y="6355080"/>
-            <a:ext cx="548640" cy="320040"/>
-          </a:xfrm>
-          <a:prstGeom prst="rect">
-            <a:avLst/>
-          </a:prstGeom>
-          <a:noFill/>
-        </p:spPr>
-        <p:txBody>
-          <a:bodyPr wrap="square" anchor="t" lIns="0" rIns="0" tIns="0" bIns="0">
-            <a:spAutoFit/>
-          </a:bodyPr>
-          <a:lstStyle/>
-          <a:p>
-            <a:pPr algn="r"/>
-            <a:r>
-              <a:rPr sz="1000" b="0" i="0">
-                <a:solidFill>
-                  <a:srgbClr val="707A8A"/>
-                </a:solidFill>
-                <a:latin typeface="Calibri"/>
-              </a:rPr>
-              <a:t>8</a:t>
-            </a:r>
-          </a:p>
-        </p:txBody>
-      </p:sp>
-      <p:sp>
-        <p:nvSpPr>
-          <p:cNvPr id="9" name="Rectangle 8"/>
-          <p:cNvSpPr/>
-          <p:nvPr/>
-        </p:nvSpPr>
-        <p:spPr>
-          <a:xfrm>
-            <a:off x="777240" y="2697480"/>
-            <a:ext cx="6583680" cy="3200400"/>
-          </a:xfrm>
-          <a:prstGeom prst="rect">
-            <a:avLst/>
-          </a:prstGeom>
-          <a:solidFill>
-            <a:srgbClr val="F4F7FB"/>
-          </a:solidFill>
-          <a:ln>
-            <a:solidFill>
-              <a:srgbClr val="D8DEE6"/>
-            </a:solidFill>
-          </a:ln>
-          <a:effectLst/>
-        </p:spPr>
-        <p:style>
-          <a:lnRef idx="1">
-            <a:schemeClr val="accent1"/>
-          </a:lnRef>
-          <a:fillRef idx="3">
-            <a:schemeClr val="accent1"/>
-          </a:fillRef>
-          <a:effectRef idx="2">
-            <a:schemeClr val="accent1"/>
-          </a:effectRef>
-          <a:fontRef idx="minor">
-            <a:schemeClr val="lt1"/>
-          </a:fontRef>
-        </p:style>
-        <p:txBody>
-          <a:bodyPr rtlCol="0" anchor="ctr" wrap="square"/>
-          <a:lstStyle/>
-          <a:p>
-            <a:pPr algn="ctr"/>
-            <a:r>
-              <a:rPr sz="1500" b="1" i="0">
-                <a:solidFill>
-                  <a:srgbClr val="707A8A"/>
-                </a:solidFill>
-                <a:latin typeface="Calibri"/>
-              </a:rPr>
-              <a:t>
-PHASE DIAGRAM
-</a:t>
-            </a:r>
-          </a:p>
-          <a:p>
-            <a:pPr algn="ctr"/>
-            <a:r>
-              <a:rPr sz="1150" b="0" i="0">
-                <a:solidFill>
-                  <a:srgbClr val="707A8A"/>
-                </a:solidFill>
-                <a:latin typeface="Calibri"/>
-              </a:rPr>
-              <a:t>x: measured overlap M     y: merge damage D
-error bars across 3 seeds
-averaging arm plotted beneath as a flat failure line</a:t>
-            </a:r>
-          </a:p>
-        </p:txBody>
-      </p:sp>
-      <p:sp>
-        <p:nvSpPr>
-          <p:cNvPr id="10" name="TextBox 9"/>
-          <p:cNvSpPr txBox="1"/>
-          <p:nvPr/>
-        </p:nvSpPr>
-        <p:spPr>
-          <a:xfrm>
-            <a:off x="7726679" y="2788920"/>
-            <a:ext cx="3687775" cy="3108960"/>
-          </a:xfrm>
-          <a:prstGeom prst="rect">
-            <a:avLst/>
-          </a:prstGeom>
-          <a:noFill/>
-        </p:spPr>
-        <p:txBody>
-          <a:bodyPr wrap="square" anchor="t" lIns="0" rIns="0" tIns="0" bIns="0">
-            <a:spAutoFit/>
-          </a:bodyPr>
-          <a:lstStyle/>
-          <a:p>
-            <a:pPr>
-              <a:spcBef>
-                <a:spcPts val="0"/>
-              </a:spcBef>
-              <a:spcAft>
-                <a:spcPts val="1000"/>
-              </a:spcAft>
-            </a:pPr>
-            <a:r>
-              <a:rPr sz="1400" b="1" i="0">
-                <a:solidFill>
-                  <a:srgbClr val="2F6FED"/>
-                </a:solidFill>
-                <a:latin typeface="Calibri"/>
-              </a:rPr>
-              <a:t>Report on this slide</a:t>
-            </a:r>
-          </a:p>
-          <a:p>
-            <a:pPr>
-              <a:spcBef>
-                <a:spcPts val="0"/>
-              </a:spcBef>
-              <a:spcAft>
-                <a:spcPts val="900"/>
-              </a:spcAft>
-            </a:pPr>
-            <a:r>
-              <a:rPr sz="1300" b="0" i="0">
-                <a:solidFill>
-                  <a:srgbClr val="2B2B2B"/>
-                </a:solidFill>
-                <a:latin typeface="Calibri"/>
-              </a:rPr>
-              <a:t>The shape found, and the transition point.</a:t>
-            </a:r>
-          </a:p>
-          <a:p>
-            <a:pPr>
-              <a:spcBef>
-                <a:spcPts val="0"/>
-              </a:spcBef>
-              <a:spcAft>
-                <a:spcPts val="900"/>
-              </a:spcAft>
-            </a:pPr>
-            <a:r>
-              <a:rPr sz="1300" b="0" i="0">
-                <a:solidFill>
-                  <a:srgbClr val="2B2B2B"/>
-                </a:solidFill>
-                <a:latin typeface="Calibri"/>
-              </a:rPr>
-              <a:t>Whether the transition is sharp or gradual.</a:t>
-            </a:r>
-          </a:p>
-          <a:p>
-            <a:pPr>
-              <a:spcBef>
-                <a:spcPts val="0"/>
-              </a:spcBef>
-              <a:spcAft>
-                <a:spcPts val="900"/>
-              </a:spcAft>
-            </a:pPr>
-            <a:r>
-              <a:rPr sz="1300" b="0" i="0">
-                <a:solidFill>
-                  <a:srgbClr val="2B2B2B"/>
-                </a:solidFill>
-                <a:latin typeface="Calibri"/>
-              </a:rPr>
-              <a:t>The asymmetry: did translation </a:t>
-            </a:r>
-            <a:r>
-              <a:rPr sz="1300" b="1" i="0">
-                <a:solidFill>
-                  <a:srgbClr val="2B2B2B"/>
-                </a:solidFill>
-                <a:latin typeface="Calibri"/>
-              </a:rPr>
-              <a:t>into</a:t>
-            </a:r>
-            <a:r>
-              <a:rPr sz="1300" b="0" i="0">
-                <a:solidFill>
-                  <a:srgbClr val="2B2B2B"/>
-                </a:solidFill>
-                <a:latin typeface="Calibri"/>
-              </a:rPr>
-              <a:t> the shared pivot survive while translation </a:t>
-            </a:r>
-            <a:r>
-              <a:rPr sz="1300" b="1" i="0">
-                <a:solidFill>
-                  <a:srgbClr val="2B2B2B"/>
-                </a:solidFill>
-                <a:latin typeface="Calibri"/>
-              </a:rPr>
-              <a:t>out</a:t>
-            </a:r>
-            <a:r>
-              <a:rPr sz="1300" b="0" i="0">
-                <a:solidFill>
-                  <a:srgbClr val="2B2B2B"/>
-                </a:solidFill>
-                <a:latin typeface="Calibri"/>
-              </a:rPr>
-              <a:t> degraded, as the paper found at full scale?</a:t>
-            </a:r>
-          </a:p>
-          <a:p>
-            <a:pPr>
-              <a:spcBef>
-                <a:spcPts val="0"/>
-              </a:spcBef>
-              <a:spcAft>
-                <a:spcPts val="900"/>
-              </a:spcAft>
-            </a:pPr>
-            <a:r>
-              <a:rPr sz="1300" b="0" i="0">
-                <a:solidFill>
-                  <a:srgbClr val="2B2B2B"/>
-                </a:solidFill>
-                <a:latin typeface="Calibri"/>
-              </a:rPr>
-              <a:t>If the curve is flat, say so — that contradicts the paper's stated mechanism and is a finding, not a failure.</a:t>
+              <a:t>Both halves of the original hypothesis are falsified. This is an honest negative result on a question the paper raises but never tests.</a:t>
             </a:r>
           </a:p>
         </p:txBody>
@@ -9248,7 +10893,7 @@
                 </a:solidFill>
                 <a:latin typeface="Calibri"/>
               </a:rPr>
-              <a:t>Result — localization and repair</a:t>
+              <a:t>Result — locality, retracted</a:t>
             </a:r>
           </a:p>
         </p:txBody>
@@ -9334,7 +10979,7 @@
                 </a:solidFill>
                 <a:latin typeface="Calibri"/>
               </a:rPr>
-              <a:t>Where merging hurts, the damage sits in identifiable neurons. Cut them, and function returns.</a:t>
+              <a:t>Ablating the collision set never recovers function — and loses to random ablation at k = 100.</a:t>
             </a:r>
           </a:p>
         </p:txBody>
@@ -9347,8 +10992,8 @@
         </p:nvSpPr>
         <p:spPr>
           <a:xfrm>
-            <a:off x="777240" y="1965960"/>
-            <a:ext cx="10637215" cy="320040"/>
+            <a:off x="777240" y="1691640"/>
+            <a:ext cx="10637215" cy="4434840"/>
           </a:xfrm>
           <a:prstGeom prst="rect">
             <a:avLst/>
@@ -9360,6 +11005,2416 @@
             <a:spAutoFit/>
           </a:bodyPr>
           <a:lstStyle/>
+          <a:p/>
+        </p:txBody>
+      </p:sp>
+      <p:sp>
+        <p:nvSpPr>
+          <p:cNvPr id="6" name="TextBox 5"/>
+          <p:cNvSpPr txBox="1"/>
+          <p:nvPr/>
+        </p:nvSpPr>
+        <p:spPr>
+          <a:xfrm>
+            <a:off x="777240" y="6355080"/>
+            <a:ext cx="10637215" cy="320040"/>
+          </a:xfrm>
+          <a:prstGeom prst="rect">
+            <a:avLst/>
+          </a:prstGeom>
+          <a:noFill/>
+        </p:spPr>
+        <p:txBody>
+          <a:bodyPr wrap="square" anchor="t" lIns="0" rIns="0" tIns="0" bIns="0">
+            <a:spAutoFit/>
+          </a:bodyPr>
+          <a:lstStyle/>
+          <a:p>
+            <a:r>
+              <a:rPr sz="1000" b="0" i="1">
+                <a:solidFill>
+                  <a:srgbClr val="707A8A"/>
+                </a:solidFill>
+                <a:latin typeface="Calibri"/>
+              </a:rPr>
+              <a:t>Technical correctness (25) + learning effectiveness (15)</a:t>
+            </a:r>
+          </a:p>
+        </p:txBody>
+      </p:sp>
+      <p:sp>
+        <p:nvSpPr>
+          <p:cNvPr id="7" name="TextBox 6"/>
+          <p:cNvSpPr txBox="1"/>
+          <p:nvPr/>
+        </p:nvSpPr>
+        <p:spPr>
+          <a:xfrm>
+            <a:off x="10865815" y="6355080"/>
+            <a:ext cx="548640" cy="320040"/>
+          </a:xfrm>
+          <a:prstGeom prst="rect">
+            <a:avLst/>
+          </a:prstGeom>
+          <a:noFill/>
+        </p:spPr>
+        <p:txBody>
+          <a:bodyPr wrap="square" anchor="t" lIns="0" rIns="0" tIns="0" bIns="0">
+            <a:spAutoFit/>
+          </a:bodyPr>
+          <a:lstStyle/>
+          <a:p>
+            <a:pPr algn="r"/>
+            <a:r>
+              <a:rPr sz="1000" b="0" i="0">
+                <a:solidFill>
+                  <a:srgbClr val="707A8A"/>
+                </a:solidFill>
+                <a:latin typeface="Calibri"/>
+              </a:rPr>
+              <a:t>9</a:t>
+            </a:r>
+          </a:p>
+        </p:txBody>
+      </p:sp>
+      <p:sp>
+        <p:nvSpPr>
+          <p:cNvPr id="8" name="Rectangle 7"/>
+          <p:cNvSpPr/>
+          <p:nvPr/>
+        </p:nvSpPr>
+        <p:spPr>
+          <a:xfrm>
+            <a:off x="777240" y="2606040"/>
+            <a:ext cx="685800" cy="365760"/>
+          </a:xfrm>
+          <a:prstGeom prst="rect">
+            <a:avLst/>
+          </a:prstGeom>
+          <a:solidFill>
+            <a:srgbClr val="0F1E3D"/>
+          </a:solidFill>
+          <a:ln>
+            <a:noFill/>
+          </a:ln>
+          <a:effectLst/>
+        </p:spPr>
+        <p:style>
+          <a:lnRef idx="1">
+            <a:schemeClr val="accent1"/>
+          </a:lnRef>
+          <a:fillRef idx="3">
+            <a:schemeClr val="accent1"/>
+          </a:fillRef>
+          <a:effectRef idx="2">
+            <a:schemeClr val="accent1"/>
+          </a:effectRef>
+          <a:fontRef idx="minor">
+            <a:schemeClr val="lt1"/>
+          </a:fontRef>
+        </p:style>
+        <p:txBody>
+          <a:bodyPr rtlCol="0" anchor="ctr" wrap="square"/>
+          <a:lstStyle/>
+          <a:p>
+            <a:pPr algn="ctr"/>
+            <a:r>
+              <a:rPr sz="1050" b="1" i="0">
+                <a:solidFill>
+                  <a:srgbClr val="FFFFFF"/>
+                </a:solidFill>
+                <a:latin typeface="Calibri"/>
+              </a:rPr>
+              <a:t>θ</a:t>
+            </a:r>
+          </a:p>
+        </p:txBody>
+      </p:sp>
+      <p:sp>
+        <p:nvSpPr>
+          <p:cNvPr id="9" name="Rectangle 8"/>
+          <p:cNvSpPr/>
+          <p:nvPr/>
+        </p:nvSpPr>
+        <p:spPr>
+          <a:xfrm>
+            <a:off x="1463040" y="2606040"/>
+            <a:ext cx="594360" cy="365760"/>
+          </a:xfrm>
+          <a:prstGeom prst="rect">
+            <a:avLst/>
+          </a:prstGeom>
+          <a:solidFill>
+            <a:srgbClr val="0F1E3D"/>
+          </a:solidFill>
+          <a:ln>
+            <a:noFill/>
+          </a:ln>
+          <a:effectLst/>
+        </p:spPr>
+        <p:style>
+          <a:lnRef idx="1">
+            <a:schemeClr val="accent1"/>
+          </a:lnRef>
+          <a:fillRef idx="3">
+            <a:schemeClr val="accent1"/>
+          </a:fillRef>
+          <a:effectRef idx="2">
+            <a:schemeClr val="accent1"/>
+          </a:effectRef>
+          <a:fontRef idx="minor">
+            <a:schemeClr val="lt1"/>
+          </a:fontRef>
+        </p:style>
+        <p:txBody>
+          <a:bodyPr rtlCol="0" anchor="ctr" wrap="square"/>
+          <a:lstStyle/>
+          <a:p>
+            <a:pPr algn="ctr"/>
+            <a:r>
+              <a:rPr sz="1050" b="1" i="0">
+                <a:solidFill>
+                  <a:srgbClr val="FFFFFF"/>
+                </a:solidFill>
+                <a:latin typeface="Calibri"/>
+              </a:rPr>
+              <a:t>k</a:t>
+            </a:r>
+          </a:p>
+        </p:txBody>
+      </p:sp>
+      <p:sp>
+        <p:nvSpPr>
+          <p:cNvPr id="10" name="Rectangle 9"/>
+          <p:cNvSpPr/>
+          <p:nvPr/>
+        </p:nvSpPr>
+        <p:spPr>
+          <a:xfrm>
+            <a:off x="2057400" y="2606040"/>
+            <a:ext cx="1417320" cy="365760"/>
+          </a:xfrm>
+          <a:prstGeom prst="rect">
+            <a:avLst/>
+          </a:prstGeom>
+          <a:solidFill>
+            <a:srgbClr val="0F1E3D"/>
+          </a:solidFill>
+          <a:ln>
+            <a:noFill/>
+          </a:ln>
+          <a:effectLst/>
+        </p:spPr>
+        <p:style>
+          <a:lnRef idx="1">
+            <a:schemeClr val="accent1"/>
+          </a:lnRef>
+          <a:fillRef idx="3">
+            <a:schemeClr val="accent1"/>
+          </a:fillRef>
+          <a:effectRef idx="2">
+            <a:schemeClr val="accent1"/>
+          </a:effectRef>
+          <a:fontRef idx="minor">
+            <a:schemeClr val="lt1"/>
+          </a:fontRef>
+        </p:style>
+        <p:txBody>
+          <a:bodyPr rtlCol="0" anchor="ctr" wrap="square"/>
+          <a:lstStyle/>
+          <a:p>
+            <a:pPr algn="ctr"/>
+            <a:r>
+              <a:rPr sz="1050" b="1" i="0">
+                <a:solidFill>
+                  <a:srgbClr val="FFFFFF"/>
+                </a:solidFill>
+                <a:latin typeface="Calibri"/>
+              </a:rPr>
+              <a:t>baseline</a:t>
+            </a:r>
+          </a:p>
+        </p:txBody>
+      </p:sp>
+      <p:sp>
+        <p:nvSpPr>
+          <p:cNvPr id="11" name="Rectangle 10"/>
+          <p:cNvSpPr/>
+          <p:nvPr/>
+        </p:nvSpPr>
+        <p:spPr>
+          <a:xfrm>
+            <a:off x="3474720" y="2606040"/>
+            <a:ext cx="1417320" cy="365760"/>
+          </a:xfrm>
+          <a:prstGeom prst="rect">
+            <a:avLst/>
+          </a:prstGeom>
+          <a:solidFill>
+            <a:srgbClr val="0F1E3D"/>
+          </a:solidFill>
+          <a:ln>
+            <a:noFill/>
+          </a:ln>
+          <a:effectLst/>
+        </p:spPr>
+        <p:style>
+          <a:lnRef idx="1">
+            <a:schemeClr val="accent1"/>
+          </a:lnRef>
+          <a:fillRef idx="3">
+            <a:schemeClr val="accent1"/>
+          </a:fillRef>
+          <a:effectRef idx="2">
+            <a:schemeClr val="accent1"/>
+          </a:effectRef>
+          <a:fontRef idx="minor">
+            <a:schemeClr val="lt1"/>
+          </a:fontRef>
+        </p:style>
+        <p:txBody>
+          <a:bodyPr rtlCol="0" anchor="ctr" wrap="square"/>
+          <a:lstStyle/>
+          <a:p>
+            <a:pPr algn="ctr"/>
+            <a:r>
+              <a:rPr sz="1050" b="1" i="0">
+                <a:solidFill>
+                  <a:srgbClr val="FFFFFF"/>
+                </a:solidFill>
+                <a:latin typeface="Calibri"/>
+              </a:rPr>
+              <a:t>collision</a:t>
+            </a:r>
+          </a:p>
+        </p:txBody>
+      </p:sp>
+      <p:sp>
+        <p:nvSpPr>
+          <p:cNvPr id="12" name="Rectangle 11"/>
+          <p:cNvSpPr/>
+          <p:nvPr/>
+        </p:nvSpPr>
+        <p:spPr>
+          <a:xfrm>
+            <a:off x="4892040" y="2606040"/>
+            <a:ext cx="1417320" cy="365760"/>
+          </a:xfrm>
+          <a:prstGeom prst="rect">
+            <a:avLst/>
+          </a:prstGeom>
+          <a:solidFill>
+            <a:srgbClr val="0F1E3D"/>
+          </a:solidFill>
+          <a:ln>
+            <a:noFill/>
+          </a:ln>
+          <a:effectLst/>
+        </p:spPr>
+        <p:style>
+          <a:lnRef idx="1">
+            <a:schemeClr val="accent1"/>
+          </a:lnRef>
+          <a:fillRef idx="3">
+            <a:schemeClr val="accent1"/>
+          </a:fillRef>
+          <a:effectRef idx="2">
+            <a:schemeClr val="accent1"/>
+          </a:effectRef>
+          <a:fontRef idx="minor">
+            <a:schemeClr val="lt1"/>
+          </a:fontRef>
+        </p:style>
+        <p:txBody>
+          <a:bodyPr rtlCol="0" anchor="ctr" wrap="square"/>
+          <a:lstStyle/>
+          <a:p>
+            <a:pPr algn="ctr"/>
+            <a:r>
+              <a:rPr sz="1050" b="1" i="0">
+                <a:solidFill>
+                  <a:srgbClr val="FFFFFF"/>
+                </a:solidFill>
+                <a:latin typeface="Calibri"/>
+              </a:rPr>
+              <a:t>random</a:t>
+            </a:r>
+          </a:p>
+        </p:txBody>
+      </p:sp>
+      <p:sp>
+        <p:nvSpPr>
+          <p:cNvPr id="13" name="Rectangle 12"/>
+          <p:cNvSpPr/>
+          <p:nvPr/>
+        </p:nvSpPr>
+        <p:spPr>
+          <a:xfrm>
+            <a:off x="6309359" y="2606040"/>
+            <a:ext cx="2377440" cy="365760"/>
+          </a:xfrm>
+          <a:prstGeom prst="rect">
+            <a:avLst/>
+          </a:prstGeom>
+          <a:solidFill>
+            <a:srgbClr val="0F1E3D"/>
+          </a:solidFill>
+          <a:ln>
+            <a:noFill/>
+          </a:ln>
+          <a:effectLst/>
+        </p:spPr>
+        <p:style>
+          <a:lnRef idx="1">
+            <a:schemeClr val="accent1"/>
+          </a:lnRef>
+          <a:fillRef idx="3">
+            <a:schemeClr val="accent1"/>
+          </a:fillRef>
+          <a:effectRef idx="2">
+            <a:schemeClr val="accent1"/>
+          </a:effectRef>
+          <a:fontRef idx="minor">
+            <a:schemeClr val="lt1"/>
+          </a:fontRef>
+        </p:style>
+        <p:txBody>
+          <a:bodyPr rtlCol="0" anchor="ctr" wrap="square"/>
+          <a:lstStyle/>
+          <a:p>
+            <a:pPr algn="ctr"/>
+            <a:r>
+              <a:rPr sz="1050" b="1" i="0">
+                <a:solidFill>
+                  <a:srgbClr val="FFFFFF"/>
+                </a:solidFill>
+                <a:latin typeface="Calibri"/>
+              </a:rPr>
+              <a:t>random − collision</a:t>
+            </a:r>
+          </a:p>
+        </p:txBody>
+      </p:sp>
+      <p:sp>
+        <p:nvSpPr>
+          <p:cNvPr id="14" name="Rectangle 13"/>
+          <p:cNvSpPr/>
+          <p:nvPr/>
+        </p:nvSpPr>
+        <p:spPr>
+          <a:xfrm>
+            <a:off x="777240" y="2971800"/>
+            <a:ext cx="685800" cy="365760"/>
+          </a:xfrm>
+          <a:prstGeom prst="rect">
+            <a:avLst/>
+          </a:prstGeom>
+          <a:solidFill>
+            <a:srgbClr val="F4F7FB"/>
+          </a:solidFill>
+          <a:ln w="9525">
+            <a:solidFill>
+              <a:srgbClr val="D8DEE6"/>
+            </a:solidFill>
+          </a:ln>
+          <a:effectLst/>
+        </p:spPr>
+        <p:style>
+          <a:lnRef idx="1">
+            <a:schemeClr val="accent1"/>
+          </a:lnRef>
+          <a:fillRef idx="3">
+            <a:schemeClr val="accent1"/>
+          </a:fillRef>
+          <a:effectRef idx="2">
+            <a:schemeClr val="accent1"/>
+          </a:effectRef>
+          <a:fontRef idx="minor">
+            <a:schemeClr val="lt1"/>
+          </a:fontRef>
+        </p:style>
+        <p:txBody>
+          <a:bodyPr rtlCol="0" anchor="ctr" wrap="square"/>
+          <a:lstStyle/>
+          <a:p>
+            <a:pPr algn="ctr"/>
+            <a:r>
+              <a:rPr sz="1050" b="0" i="0">
+                <a:solidFill>
+                  <a:srgbClr val="2B2B2B"/>
+                </a:solidFill>
+                <a:latin typeface="Calibri"/>
+              </a:rPr>
+              <a:t>0.0</a:t>
+            </a:r>
+          </a:p>
+        </p:txBody>
+      </p:sp>
+      <p:sp>
+        <p:nvSpPr>
+          <p:cNvPr id="15" name="Rectangle 14"/>
+          <p:cNvSpPr/>
+          <p:nvPr/>
+        </p:nvSpPr>
+        <p:spPr>
+          <a:xfrm>
+            <a:off x="1463040" y="2971800"/>
+            <a:ext cx="594360" cy="365760"/>
+          </a:xfrm>
+          <a:prstGeom prst="rect">
+            <a:avLst/>
+          </a:prstGeom>
+          <a:solidFill>
+            <a:srgbClr val="F4F7FB"/>
+          </a:solidFill>
+          <a:ln w="9525">
+            <a:solidFill>
+              <a:srgbClr val="D8DEE6"/>
+            </a:solidFill>
+          </a:ln>
+          <a:effectLst/>
+        </p:spPr>
+        <p:style>
+          <a:lnRef idx="1">
+            <a:schemeClr val="accent1"/>
+          </a:lnRef>
+          <a:fillRef idx="3">
+            <a:schemeClr val="accent1"/>
+          </a:fillRef>
+          <a:effectRef idx="2">
+            <a:schemeClr val="accent1"/>
+          </a:effectRef>
+          <a:fontRef idx="minor">
+            <a:schemeClr val="lt1"/>
+          </a:fontRef>
+        </p:style>
+        <p:txBody>
+          <a:bodyPr rtlCol="0" anchor="ctr" wrap="square"/>
+          <a:lstStyle/>
+          <a:p>
+            <a:pPr algn="ctr"/>
+            <a:r>
+              <a:rPr sz="1050" b="0" i="0">
+                <a:solidFill>
+                  <a:srgbClr val="2B2B2B"/>
+                </a:solidFill>
+                <a:latin typeface="Calibri"/>
+              </a:rPr>
+              <a:t>40</a:t>
+            </a:r>
+          </a:p>
+        </p:txBody>
+      </p:sp>
+      <p:sp>
+        <p:nvSpPr>
+          <p:cNvPr id="16" name="Rectangle 15"/>
+          <p:cNvSpPr/>
+          <p:nvPr/>
+        </p:nvSpPr>
+        <p:spPr>
+          <a:xfrm>
+            <a:off x="2057400" y="2971800"/>
+            <a:ext cx="1417320" cy="365760"/>
+          </a:xfrm>
+          <a:prstGeom prst="rect">
+            <a:avLst/>
+          </a:prstGeom>
+          <a:solidFill>
+            <a:srgbClr val="F4F7FB"/>
+          </a:solidFill>
+          <a:ln w="9525">
+            <a:solidFill>
+              <a:srgbClr val="D8DEE6"/>
+            </a:solidFill>
+          </a:ln>
+          <a:effectLst/>
+        </p:spPr>
+        <p:style>
+          <a:lnRef idx="1">
+            <a:schemeClr val="accent1"/>
+          </a:lnRef>
+          <a:fillRef idx="3">
+            <a:schemeClr val="accent1"/>
+          </a:fillRef>
+          <a:effectRef idx="2">
+            <a:schemeClr val="accent1"/>
+          </a:effectRef>
+          <a:fontRef idx="minor">
+            <a:schemeClr val="lt1"/>
+          </a:fontRef>
+        </p:style>
+        <p:txBody>
+          <a:bodyPr rtlCol="0" anchor="ctr" wrap="square"/>
+          <a:lstStyle/>
+          <a:p>
+            <a:pPr algn="ctr"/>
+            <a:r>
+              <a:rPr sz="1050" b="0" i="0">
+                <a:solidFill>
+                  <a:srgbClr val="2B2B2B"/>
+                </a:solidFill>
+                <a:latin typeface="Calibri"/>
+              </a:rPr>
+              <a:t>1.5881</a:t>
+            </a:r>
+          </a:p>
+        </p:txBody>
+      </p:sp>
+      <p:sp>
+        <p:nvSpPr>
+          <p:cNvPr id="17" name="Rectangle 16"/>
+          <p:cNvSpPr/>
+          <p:nvPr/>
+        </p:nvSpPr>
+        <p:spPr>
+          <a:xfrm>
+            <a:off x="3474720" y="2971800"/>
+            <a:ext cx="1417320" cy="365760"/>
+          </a:xfrm>
+          <a:prstGeom prst="rect">
+            <a:avLst/>
+          </a:prstGeom>
+          <a:solidFill>
+            <a:srgbClr val="F4F7FB"/>
+          </a:solidFill>
+          <a:ln w="9525">
+            <a:solidFill>
+              <a:srgbClr val="D8DEE6"/>
+            </a:solidFill>
+          </a:ln>
+          <a:effectLst/>
+        </p:spPr>
+        <p:style>
+          <a:lnRef idx="1">
+            <a:schemeClr val="accent1"/>
+          </a:lnRef>
+          <a:fillRef idx="3">
+            <a:schemeClr val="accent1"/>
+          </a:fillRef>
+          <a:effectRef idx="2">
+            <a:schemeClr val="accent1"/>
+          </a:effectRef>
+          <a:fontRef idx="minor">
+            <a:schemeClr val="lt1"/>
+          </a:fontRef>
+        </p:style>
+        <p:txBody>
+          <a:bodyPr rtlCol="0" anchor="ctr" wrap="square"/>
+          <a:lstStyle/>
+          <a:p>
+            <a:pPr algn="ctr"/>
+            <a:r>
+              <a:rPr sz="1050" b="0" i="0">
+                <a:solidFill>
+                  <a:srgbClr val="2B2B2B"/>
+                </a:solidFill>
+                <a:latin typeface="Calibri"/>
+              </a:rPr>
+              <a:t>1.5871</a:t>
+            </a:r>
+          </a:p>
+        </p:txBody>
+      </p:sp>
+      <p:sp>
+        <p:nvSpPr>
+          <p:cNvPr id="18" name="Rectangle 17"/>
+          <p:cNvSpPr/>
+          <p:nvPr/>
+        </p:nvSpPr>
+        <p:spPr>
+          <a:xfrm>
+            <a:off x="4892040" y="2971800"/>
+            <a:ext cx="1417320" cy="365760"/>
+          </a:xfrm>
+          <a:prstGeom prst="rect">
+            <a:avLst/>
+          </a:prstGeom>
+          <a:solidFill>
+            <a:srgbClr val="F4F7FB"/>
+          </a:solidFill>
+          <a:ln w="9525">
+            <a:solidFill>
+              <a:srgbClr val="D8DEE6"/>
+            </a:solidFill>
+          </a:ln>
+          <a:effectLst/>
+        </p:spPr>
+        <p:style>
+          <a:lnRef idx="1">
+            <a:schemeClr val="accent1"/>
+          </a:lnRef>
+          <a:fillRef idx="3">
+            <a:schemeClr val="accent1"/>
+          </a:fillRef>
+          <a:effectRef idx="2">
+            <a:schemeClr val="accent1"/>
+          </a:effectRef>
+          <a:fontRef idx="minor">
+            <a:schemeClr val="lt1"/>
+          </a:fontRef>
+        </p:style>
+        <p:txBody>
+          <a:bodyPr rtlCol="0" anchor="ctr" wrap="square"/>
+          <a:lstStyle/>
+          <a:p>
+            <a:pPr algn="ctr"/>
+            <a:r>
+              <a:rPr sz="1050" b="0" i="0">
+                <a:solidFill>
+                  <a:srgbClr val="2B2B2B"/>
+                </a:solidFill>
+                <a:latin typeface="Calibri"/>
+              </a:rPr>
+              <a:t>1.5886</a:t>
+            </a:r>
+          </a:p>
+        </p:txBody>
+      </p:sp>
+      <p:sp>
+        <p:nvSpPr>
+          <p:cNvPr id="19" name="Rectangle 18"/>
+          <p:cNvSpPr/>
+          <p:nvPr/>
+        </p:nvSpPr>
+        <p:spPr>
+          <a:xfrm>
+            <a:off x="6309359" y="2971800"/>
+            <a:ext cx="2377440" cy="365760"/>
+          </a:xfrm>
+          <a:prstGeom prst="rect">
+            <a:avLst/>
+          </a:prstGeom>
+          <a:solidFill>
+            <a:srgbClr val="F4F7FB"/>
+          </a:solidFill>
+          <a:ln w="9525">
+            <a:solidFill>
+              <a:srgbClr val="D8DEE6"/>
+            </a:solidFill>
+          </a:ln>
+          <a:effectLst/>
+        </p:spPr>
+        <p:style>
+          <a:lnRef idx="1">
+            <a:schemeClr val="accent1"/>
+          </a:lnRef>
+          <a:fillRef idx="3">
+            <a:schemeClr val="accent1"/>
+          </a:fillRef>
+          <a:effectRef idx="2">
+            <a:schemeClr val="accent1"/>
+          </a:effectRef>
+          <a:fontRef idx="minor">
+            <a:schemeClr val="lt1"/>
+          </a:fontRef>
+        </p:style>
+        <p:txBody>
+          <a:bodyPr rtlCol="0" anchor="ctr" wrap="square"/>
+          <a:lstStyle/>
+          <a:p>
+            <a:pPr algn="ctr"/>
+            <a:r>
+              <a:rPr sz="1050" b="1" i="0">
+                <a:solidFill>
+                  <a:srgbClr val="2B2B2B"/>
+                </a:solidFill>
+                <a:latin typeface="Calibri"/>
+              </a:rPr>
+              <a:t>+0.0014</a:t>
+            </a:r>
+          </a:p>
+        </p:txBody>
+      </p:sp>
+      <p:sp>
+        <p:nvSpPr>
+          <p:cNvPr id="20" name="Rectangle 19"/>
+          <p:cNvSpPr/>
+          <p:nvPr/>
+        </p:nvSpPr>
+        <p:spPr>
+          <a:xfrm>
+            <a:off x="777240" y="3337560"/>
+            <a:ext cx="685800" cy="365760"/>
+          </a:xfrm>
+          <a:prstGeom prst="rect">
+            <a:avLst/>
+          </a:prstGeom>
+          <a:solidFill>
+            <a:srgbClr val="FFFFFF"/>
+          </a:solidFill>
+          <a:ln w="9525">
+            <a:solidFill>
+              <a:srgbClr val="D8DEE6"/>
+            </a:solidFill>
+          </a:ln>
+          <a:effectLst/>
+        </p:spPr>
+        <p:style>
+          <a:lnRef idx="1">
+            <a:schemeClr val="accent1"/>
+          </a:lnRef>
+          <a:fillRef idx="3">
+            <a:schemeClr val="accent1"/>
+          </a:fillRef>
+          <a:effectRef idx="2">
+            <a:schemeClr val="accent1"/>
+          </a:effectRef>
+          <a:fontRef idx="minor">
+            <a:schemeClr val="lt1"/>
+          </a:fontRef>
+        </p:style>
+        <p:txBody>
+          <a:bodyPr rtlCol="0" anchor="ctr" wrap="square"/>
+          <a:lstStyle/>
+          <a:p>
+            <a:pPr algn="ctr"/>
+            <a:r>
+              <a:rPr sz="1050" b="0" i="0">
+                <a:solidFill>
+                  <a:srgbClr val="2B2B2B"/>
+                </a:solidFill>
+                <a:latin typeface="Calibri"/>
+              </a:rPr>
+              <a:t>0.5</a:t>
+            </a:r>
+          </a:p>
+        </p:txBody>
+      </p:sp>
+      <p:sp>
+        <p:nvSpPr>
+          <p:cNvPr id="21" name="Rectangle 20"/>
+          <p:cNvSpPr/>
+          <p:nvPr/>
+        </p:nvSpPr>
+        <p:spPr>
+          <a:xfrm>
+            <a:off x="1463040" y="3337560"/>
+            <a:ext cx="594360" cy="365760"/>
+          </a:xfrm>
+          <a:prstGeom prst="rect">
+            <a:avLst/>
+          </a:prstGeom>
+          <a:solidFill>
+            <a:srgbClr val="FFFFFF"/>
+          </a:solidFill>
+          <a:ln w="9525">
+            <a:solidFill>
+              <a:srgbClr val="D8DEE6"/>
+            </a:solidFill>
+          </a:ln>
+          <a:effectLst/>
+        </p:spPr>
+        <p:style>
+          <a:lnRef idx="1">
+            <a:schemeClr val="accent1"/>
+          </a:lnRef>
+          <a:fillRef idx="3">
+            <a:schemeClr val="accent1"/>
+          </a:fillRef>
+          <a:effectRef idx="2">
+            <a:schemeClr val="accent1"/>
+          </a:effectRef>
+          <a:fontRef idx="minor">
+            <a:schemeClr val="lt1"/>
+          </a:fontRef>
+        </p:style>
+        <p:txBody>
+          <a:bodyPr rtlCol="0" anchor="ctr" wrap="square"/>
+          <a:lstStyle/>
+          <a:p>
+            <a:pPr algn="ctr"/>
+            <a:r>
+              <a:rPr sz="1050" b="0" i="0">
+                <a:solidFill>
+                  <a:srgbClr val="2B2B2B"/>
+                </a:solidFill>
+                <a:latin typeface="Calibri"/>
+              </a:rPr>
+              <a:t>40</a:t>
+            </a:r>
+          </a:p>
+        </p:txBody>
+      </p:sp>
+      <p:sp>
+        <p:nvSpPr>
+          <p:cNvPr id="22" name="Rectangle 21"/>
+          <p:cNvSpPr/>
+          <p:nvPr/>
+        </p:nvSpPr>
+        <p:spPr>
+          <a:xfrm>
+            <a:off x="2057400" y="3337560"/>
+            <a:ext cx="1417320" cy="365760"/>
+          </a:xfrm>
+          <a:prstGeom prst="rect">
+            <a:avLst/>
+          </a:prstGeom>
+          <a:solidFill>
+            <a:srgbClr val="FFFFFF"/>
+          </a:solidFill>
+          <a:ln w="9525">
+            <a:solidFill>
+              <a:srgbClr val="D8DEE6"/>
+            </a:solidFill>
+          </a:ln>
+          <a:effectLst/>
+        </p:spPr>
+        <p:style>
+          <a:lnRef idx="1">
+            <a:schemeClr val="accent1"/>
+          </a:lnRef>
+          <a:fillRef idx="3">
+            <a:schemeClr val="accent1"/>
+          </a:fillRef>
+          <a:effectRef idx="2">
+            <a:schemeClr val="accent1"/>
+          </a:effectRef>
+          <a:fontRef idx="minor">
+            <a:schemeClr val="lt1"/>
+          </a:fontRef>
+        </p:style>
+        <p:txBody>
+          <a:bodyPr rtlCol="0" anchor="ctr" wrap="square"/>
+          <a:lstStyle/>
+          <a:p>
+            <a:pPr algn="ctr"/>
+            <a:r>
+              <a:rPr sz="1050" b="0" i="0">
+                <a:solidFill>
+                  <a:srgbClr val="2B2B2B"/>
+                </a:solidFill>
+                <a:latin typeface="Calibri"/>
+              </a:rPr>
+              <a:t>2.0186</a:t>
+            </a:r>
+          </a:p>
+        </p:txBody>
+      </p:sp>
+      <p:sp>
+        <p:nvSpPr>
+          <p:cNvPr id="23" name="Rectangle 22"/>
+          <p:cNvSpPr/>
+          <p:nvPr/>
+        </p:nvSpPr>
+        <p:spPr>
+          <a:xfrm>
+            <a:off x="3474720" y="3337560"/>
+            <a:ext cx="1417320" cy="365760"/>
+          </a:xfrm>
+          <a:prstGeom prst="rect">
+            <a:avLst/>
+          </a:prstGeom>
+          <a:solidFill>
+            <a:srgbClr val="FFFFFF"/>
+          </a:solidFill>
+          <a:ln w="9525">
+            <a:solidFill>
+              <a:srgbClr val="D8DEE6"/>
+            </a:solidFill>
+          </a:ln>
+          <a:effectLst/>
+        </p:spPr>
+        <p:style>
+          <a:lnRef idx="1">
+            <a:schemeClr val="accent1"/>
+          </a:lnRef>
+          <a:fillRef idx="3">
+            <a:schemeClr val="accent1"/>
+          </a:fillRef>
+          <a:effectRef idx="2">
+            <a:schemeClr val="accent1"/>
+          </a:effectRef>
+          <a:fontRef idx="minor">
+            <a:schemeClr val="lt1"/>
+          </a:fontRef>
+        </p:style>
+        <p:txBody>
+          <a:bodyPr rtlCol="0" anchor="ctr" wrap="square"/>
+          <a:lstStyle/>
+          <a:p>
+            <a:pPr algn="ctr"/>
+            <a:r>
+              <a:rPr sz="1050" b="0" i="0">
+                <a:solidFill>
+                  <a:srgbClr val="2B2B2B"/>
+                </a:solidFill>
+                <a:latin typeface="Calibri"/>
+              </a:rPr>
+              <a:t>2.0212</a:t>
+            </a:r>
+          </a:p>
+        </p:txBody>
+      </p:sp>
+      <p:sp>
+        <p:nvSpPr>
+          <p:cNvPr id="24" name="Rectangle 23"/>
+          <p:cNvSpPr/>
+          <p:nvPr/>
+        </p:nvSpPr>
+        <p:spPr>
+          <a:xfrm>
+            <a:off x="4892040" y="3337560"/>
+            <a:ext cx="1417320" cy="365760"/>
+          </a:xfrm>
+          <a:prstGeom prst="rect">
+            <a:avLst/>
+          </a:prstGeom>
+          <a:solidFill>
+            <a:srgbClr val="FFFFFF"/>
+          </a:solidFill>
+          <a:ln w="9525">
+            <a:solidFill>
+              <a:srgbClr val="D8DEE6"/>
+            </a:solidFill>
+          </a:ln>
+          <a:effectLst/>
+        </p:spPr>
+        <p:style>
+          <a:lnRef idx="1">
+            <a:schemeClr val="accent1"/>
+          </a:lnRef>
+          <a:fillRef idx="3">
+            <a:schemeClr val="accent1"/>
+          </a:fillRef>
+          <a:effectRef idx="2">
+            <a:schemeClr val="accent1"/>
+          </a:effectRef>
+          <a:fontRef idx="minor">
+            <a:schemeClr val="lt1"/>
+          </a:fontRef>
+        </p:style>
+        <p:txBody>
+          <a:bodyPr rtlCol="0" anchor="ctr" wrap="square"/>
+          <a:lstStyle/>
+          <a:p>
+            <a:pPr algn="ctr"/>
+            <a:r>
+              <a:rPr sz="1050" b="0" i="0">
+                <a:solidFill>
+                  <a:srgbClr val="2B2B2B"/>
+                </a:solidFill>
+                <a:latin typeface="Calibri"/>
+              </a:rPr>
+              <a:t>1.9999</a:t>
+            </a:r>
+          </a:p>
+        </p:txBody>
+      </p:sp>
+      <p:sp>
+        <p:nvSpPr>
+          <p:cNvPr id="25" name="Rectangle 24"/>
+          <p:cNvSpPr/>
+          <p:nvPr/>
+        </p:nvSpPr>
+        <p:spPr>
+          <a:xfrm>
+            <a:off x="6309359" y="3337560"/>
+            <a:ext cx="2377440" cy="365760"/>
+          </a:xfrm>
+          <a:prstGeom prst="rect">
+            <a:avLst/>
+          </a:prstGeom>
+          <a:solidFill>
+            <a:srgbClr val="FFFFFF"/>
+          </a:solidFill>
+          <a:ln w="9525">
+            <a:solidFill>
+              <a:srgbClr val="D8DEE6"/>
+            </a:solidFill>
+          </a:ln>
+          <a:effectLst/>
+        </p:spPr>
+        <p:style>
+          <a:lnRef idx="1">
+            <a:schemeClr val="accent1"/>
+          </a:lnRef>
+          <a:fillRef idx="3">
+            <a:schemeClr val="accent1"/>
+          </a:fillRef>
+          <a:effectRef idx="2">
+            <a:schemeClr val="accent1"/>
+          </a:effectRef>
+          <a:fontRef idx="minor">
+            <a:schemeClr val="lt1"/>
+          </a:fontRef>
+        </p:style>
+        <p:txBody>
+          <a:bodyPr rtlCol="0" anchor="ctr" wrap="square"/>
+          <a:lstStyle/>
+          <a:p>
+            <a:pPr algn="ctr"/>
+            <a:r>
+              <a:rPr sz="1050" b="1" i="0">
+                <a:solidFill>
+                  <a:srgbClr val="D97A0B"/>
+                </a:solidFill>
+                <a:latin typeface="Calibri"/>
+              </a:rPr>
+              <a:t>−0.0213 (shipped default)</a:t>
+            </a:r>
+          </a:p>
+        </p:txBody>
+      </p:sp>
+      <p:sp>
+        <p:nvSpPr>
+          <p:cNvPr id="26" name="Rectangle 25"/>
+          <p:cNvSpPr/>
+          <p:nvPr/>
+        </p:nvSpPr>
+        <p:spPr>
+          <a:xfrm>
+            <a:off x="777240" y="3703320"/>
+            <a:ext cx="685800" cy="365760"/>
+          </a:xfrm>
+          <a:prstGeom prst="rect">
+            <a:avLst/>
+          </a:prstGeom>
+          <a:solidFill>
+            <a:srgbClr val="F4F7FB"/>
+          </a:solidFill>
+          <a:ln w="9525">
+            <a:solidFill>
+              <a:srgbClr val="D8DEE6"/>
+            </a:solidFill>
+          </a:ln>
+          <a:effectLst/>
+        </p:spPr>
+        <p:style>
+          <a:lnRef idx="1">
+            <a:schemeClr val="accent1"/>
+          </a:lnRef>
+          <a:fillRef idx="3">
+            <a:schemeClr val="accent1"/>
+          </a:fillRef>
+          <a:effectRef idx="2">
+            <a:schemeClr val="accent1"/>
+          </a:effectRef>
+          <a:fontRef idx="minor">
+            <a:schemeClr val="lt1"/>
+          </a:fontRef>
+        </p:style>
+        <p:txBody>
+          <a:bodyPr rtlCol="0" anchor="ctr" wrap="square"/>
+          <a:lstStyle/>
+          <a:p>
+            <a:pPr algn="ctr"/>
+            <a:r>
+              <a:rPr sz="1050" b="0" i="0">
+                <a:solidFill>
+                  <a:srgbClr val="2B2B2B"/>
+                </a:solidFill>
+                <a:latin typeface="Calibri"/>
+              </a:rPr>
+              <a:t>1.0</a:t>
+            </a:r>
+          </a:p>
+        </p:txBody>
+      </p:sp>
+      <p:sp>
+        <p:nvSpPr>
+          <p:cNvPr id="27" name="Rectangle 26"/>
+          <p:cNvSpPr/>
+          <p:nvPr/>
+        </p:nvSpPr>
+        <p:spPr>
+          <a:xfrm>
+            <a:off x="1463040" y="3703320"/>
+            <a:ext cx="594360" cy="365760"/>
+          </a:xfrm>
+          <a:prstGeom prst="rect">
+            <a:avLst/>
+          </a:prstGeom>
+          <a:solidFill>
+            <a:srgbClr val="F4F7FB"/>
+          </a:solidFill>
+          <a:ln w="9525">
+            <a:solidFill>
+              <a:srgbClr val="D8DEE6"/>
+            </a:solidFill>
+          </a:ln>
+          <a:effectLst/>
+        </p:spPr>
+        <p:style>
+          <a:lnRef idx="1">
+            <a:schemeClr val="accent1"/>
+          </a:lnRef>
+          <a:fillRef idx="3">
+            <a:schemeClr val="accent1"/>
+          </a:fillRef>
+          <a:effectRef idx="2">
+            <a:schemeClr val="accent1"/>
+          </a:effectRef>
+          <a:fontRef idx="minor">
+            <a:schemeClr val="lt1"/>
+          </a:fontRef>
+        </p:style>
+        <p:txBody>
+          <a:bodyPr rtlCol="0" anchor="ctr" wrap="square"/>
+          <a:lstStyle/>
+          <a:p>
+            <a:pPr algn="ctr"/>
+            <a:r>
+              <a:rPr sz="1050" b="0" i="0">
+                <a:solidFill>
+                  <a:srgbClr val="2B2B2B"/>
+                </a:solidFill>
+                <a:latin typeface="Calibri"/>
+              </a:rPr>
+              <a:t>40</a:t>
+            </a:r>
+          </a:p>
+        </p:txBody>
+      </p:sp>
+      <p:sp>
+        <p:nvSpPr>
+          <p:cNvPr id="28" name="Rectangle 27"/>
+          <p:cNvSpPr/>
+          <p:nvPr/>
+        </p:nvSpPr>
+        <p:spPr>
+          <a:xfrm>
+            <a:off x="2057400" y="3703320"/>
+            <a:ext cx="1417320" cy="365760"/>
+          </a:xfrm>
+          <a:prstGeom prst="rect">
+            <a:avLst/>
+          </a:prstGeom>
+          <a:solidFill>
+            <a:srgbClr val="F4F7FB"/>
+          </a:solidFill>
+          <a:ln w="9525">
+            <a:solidFill>
+              <a:srgbClr val="D8DEE6"/>
+            </a:solidFill>
+          </a:ln>
+          <a:effectLst/>
+        </p:spPr>
+        <p:style>
+          <a:lnRef idx="1">
+            <a:schemeClr val="accent1"/>
+          </a:lnRef>
+          <a:fillRef idx="3">
+            <a:schemeClr val="accent1"/>
+          </a:fillRef>
+          <a:effectRef idx="2">
+            <a:schemeClr val="accent1"/>
+          </a:effectRef>
+          <a:fontRef idx="minor">
+            <a:schemeClr val="lt1"/>
+          </a:fontRef>
+        </p:style>
+        <p:txBody>
+          <a:bodyPr rtlCol="0" anchor="ctr" wrap="square"/>
+          <a:lstStyle/>
+          <a:p>
+            <a:pPr algn="ctr"/>
+            <a:r>
+              <a:rPr sz="1050" b="0" i="0">
+                <a:solidFill>
+                  <a:srgbClr val="2B2B2B"/>
+                </a:solidFill>
+                <a:latin typeface="Calibri"/>
+              </a:rPr>
+              <a:t>1.9841</a:t>
+            </a:r>
+          </a:p>
+        </p:txBody>
+      </p:sp>
+      <p:sp>
+        <p:nvSpPr>
+          <p:cNvPr id="29" name="Rectangle 28"/>
+          <p:cNvSpPr/>
+          <p:nvPr/>
+        </p:nvSpPr>
+        <p:spPr>
+          <a:xfrm>
+            <a:off x="3474720" y="3703320"/>
+            <a:ext cx="1417320" cy="365760"/>
+          </a:xfrm>
+          <a:prstGeom prst="rect">
+            <a:avLst/>
+          </a:prstGeom>
+          <a:solidFill>
+            <a:srgbClr val="F4F7FB"/>
+          </a:solidFill>
+          <a:ln w="9525">
+            <a:solidFill>
+              <a:srgbClr val="D8DEE6"/>
+            </a:solidFill>
+          </a:ln>
+          <a:effectLst/>
+        </p:spPr>
+        <p:style>
+          <a:lnRef idx="1">
+            <a:schemeClr val="accent1"/>
+          </a:lnRef>
+          <a:fillRef idx="3">
+            <a:schemeClr val="accent1"/>
+          </a:fillRef>
+          <a:effectRef idx="2">
+            <a:schemeClr val="accent1"/>
+          </a:effectRef>
+          <a:fontRef idx="minor">
+            <a:schemeClr val="lt1"/>
+          </a:fontRef>
+        </p:style>
+        <p:txBody>
+          <a:bodyPr rtlCol="0" anchor="ctr" wrap="square"/>
+          <a:lstStyle/>
+          <a:p>
+            <a:pPr algn="ctr"/>
+            <a:r>
+              <a:rPr sz="1050" b="0" i="0">
+                <a:solidFill>
+                  <a:srgbClr val="2B2B2B"/>
+                </a:solidFill>
+                <a:latin typeface="Calibri"/>
+              </a:rPr>
+              <a:t>1.9899</a:t>
+            </a:r>
+          </a:p>
+        </p:txBody>
+      </p:sp>
+      <p:sp>
+        <p:nvSpPr>
+          <p:cNvPr id="30" name="Rectangle 29"/>
+          <p:cNvSpPr/>
+          <p:nvPr/>
+        </p:nvSpPr>
+        <p:spPr>
+          <a:xfrm>
+            <a:off x="4892040" y="3703320"/>
+            <a:ext cx="1417320" cy="365760"/>
+          </a:xfrm>
+          <a:prstGeom prst="rect">
+            <a:avLst/>
+          </a:prstGeom>
+          <a:solidFill>
+            <a:srgbClr val="F4F7FB"/>
+          </a:solidFill>
+          <a:ln w="9525">
+            <a:solidFill>
+              <a:srgbClr val="D8DEE6"/>
+            </a:solidFill>
+          </a:ln>
+          <a:effectLst/>
+        </p:spPr>
+        <p:style>
+          <a:lnRef idx="1">
+            <a:schemeClr val="accent1"/>
+          </a:lnRef>
+          <a:fillRef idx="3">
+            <a:schemeClr val="accent1"/>
+          </a:fillRef>
+          <a:effectRef idx="2">
+            <a:schemeClr val="accent1"/>
+          </a:effectRef>
+          <a:fontRef idx="minor">
+            <a:schemeClr val="lt1"/>
+          </a:fontRef>
+        </p:style>
+        <p:txBody>
+          <a:bodyPr rtlCol="0" anchor="ctr" wrap="square"/>
+          <a:lstStyle/>
+          <a:p>
+            <a:pPr algn="ctr"/>
+            <a:r>
+              <a:rPr sz="1050" b="0" i="0">
+                <a:solidFill>
+                  <a:srgbClr val="2B2B2B"/>
+                </a:solidFill>
+                <a:latin typeface="Calibri"/>
+              </a:rPr>
+              <a:t>1.9797</a:t>
+            </a:r>
+          </a:p>
+        </p:txBody>
+      </p:sp>
+      <p:sp>
+        <p:nvSpPr>
+          <p:cNvPr id="31" name="Rectangle 30"/>
+          <p:cNvSpPr/>
+          <p:nvPr/>
+        </p:nvSpPr>
+        <p:spPr>
+          <a:xfrm>
+            <a:off x="6309359" y="3703320"/>
+            <a:ext cx="2377440" cy="365760"/>
+          </a:xfrm>
+          <a:prstGeom prst="rect">
+            <a:avLst/>
+          </a:prstGeom>
+          <a:solidFill>
+            <a:srgbClr val="F4F7FB"/>
+          </a:solidFill>
+          <a:ln w="9525">
+            <a:solidFill>
+              <a:srgbClr val="D8DEE6"/>
+            </a:solidFill>
+          </a:ln>
+          <a:effectLst/>
+        </p:spPr>
+        <p:style>
+          <a:lnRef idx="1">
+            <a:schemeClr val="accent1"/>
+          </a:lnRef>
+          <a:fillRef idx="3">
+            <a:schemeClr val="accent1"/>
+          </a:fillRef>
+          <a:effectRef idx="2">
+            <a:schemeClr val="accent1"/>
+          </a:effectRef>
+          <a:fontRef idx="minor">
+            <a:schemeClr val="lt1"/>
+          </a:fontRef>
+        </p:style>
+        <p:txBody>
+          <a:bodyPr rtlCol="0" anchor="ctr" wrap="square"/>
+          <a:lstStyle/>
+          <a:p>
+            <a:pPr algn="ctr"/>
+            <a:r>
+              <a:rPr sz="1050" b="1" i="0">
+                <a:solidFill>
+                  <a:srgbClr val="D97A0B"/>
+                </a:solidFill>
+                <a:latin typeface="Calibri"/>
+              </a:rPr>
+              <a:t>−0.0102</a:t>
+            </a:r>
+          </a:p>
+        </p:txBody>
+      </p:sp>
+      <p:sp>
+        <p:nvSpPr>
+          <p:cNvPr id="32" name="Rectangle 31"/>
+          <p:cNvSpPr/>
+          <p:nvPr/>
+        </p:nvSpPr>
+        <p:spPr>
+          <a:xfrm>
+            <a:off x="777240" y="4069080"/>
+            <a:ext cx="685800" cy="365760"/>
+          </a:xfrm>
+          <a:prstGeom prst="rect">
+            <a:avLst/>
+          </a:prstGeom>
+          <a:solidFill>
+            <a:srgbClr val="FFFFFF"/>
+          </a:solidFill>
+          <a:ln w="9525">
+            <a:solidFill>
+              <a:srgbClr val="D8DEE6"/>
+            </a:solidFill>
+          </a:ln>
+          <a:effectLst/>
+        </p:spPr>
+        <p:style>
+          <a:lnRef idx="1">
+            <a:schemeClr val="accent1"/>
+          </a:lnRef>
+          <a:fillRef idx="3">
+            <a:schemeClr val="accent1"/>
+          </a:fillRef>
+          <a:effectRef idx="2">
+            <a:schemeClr val="accent1"/>
+          </a:effectRef>
+          <a:fontRef idx="minor">
+            <a:schemeClr val="lt1"/>
+          </a:fontRef>
+        </p:style>
+        <p:txBody>
+          <a:bodyPr rtlCol="0" anchor="ctr" wrap="square"/>
+          <a:lstStyle/>
+          <a:p>
+            <a:pPr algn="ctr"/>
+            <a:r>
+              <a:rPr sz="1050" b="0" i="0">
+                <a:solidFill>
+                  <a:srgbClr val="2B2B2B"/>
+                </a:solidFill>
+                <a:latin typeface="Calibri"/>
+              </a:rPr>
+              <a:t>0.0</a:t>
+            </a:r>
+          </a:p>
+        </p:txBody>
+      </p:sp>
+      <p:sp>
+        <p:nvSpPr>
+          <p:cNvPr id="33" name="Rectangle 32"/>
+          <p:cNvSpPr/>
+          <p:nvPr/>
+        </p:nvSpPr>
+        <p:spPr>
+          <a:xfrm>
+            <a:off x="1463040" y="4069080"/>
+            <a:ext cx="594360" cy="365760"/>
+          </a:xfrm>
+          <a:prstGeom prst="rect">
+            <a:avLst/>
+          </a:prstGeom>
+          <a:solidFill>
+            <a:srgbClr val="FFFFFF"/>
+          </a:solidFill>
+          <a:ln w="9525">
+            <a:solidFill>
+              <a:srgbClr val="D8DEE6"/>
+            </a:solidFill>
+          </a:ln>
+          <a:effectLst/>
+        </p:spPr>
+        <p:style>
+          <a:lnRef idx="1">
+            <a:schemeClr val="accent1"/>
+          </a:lnRef>
+          <a:fillRef idx="3">
+            <a:schemeClr val="accent1"/>
+          </a:fillRef>
+          <a:effectRef idx="2">
+            <a:schemeClr val="accent1"/>
+          </a:effectRef>
+          <a:fontRef idx="minor">
+            <a:schemeClr val="lt1"/>
+          </a:fontRef>
+        </p:style>
+        <p:txBody>
+          <a:bodyPr rtlCol="0" anchor="ctr" wrap="square"/>
+          <a:lstStyle/>
+          <a:p>
+            <a:pPr algn="ctr"/>
+            <a:r>
+              <a:rPr sz="1050" b="0" i="0">
+                <a:solidFill>
+                  <a:srgbClr val="2B2B2B"/>
+                </a:solidFill>
+                <a:latin typeface="Calibri"/>
+              </a:rPr>
+              <a:t>100</a:t>
+            </a:r>
+          </a:p>
+        </p:txBody>
+      </p:sp>
+      <p:sp>
+        <p:nvSpPr>
+          <p:cNvPr id="34" name="Rectangle 33"/>
+          <p:cNvSpPr/>
+          <p:nvPr/>
+        </p:nvSpPr>
+        <p:spPr>
+          <a:xfrm>
+            <a:off x="2057400" y="4069080"/>
+            <a:ext cx="1417320" cy="365760"/>
+          </a:xfrm>
+          <a:prstGeom prst="rect">
+            <a:avLst/>
+          </a:prstGeom>
+          <a:solidFill>
+            <a:srgbClr val="FFFFFF"/>
+          </a:solidFill>
+          <a:ln w="9525">
+            <a:solidFill>
+              <a:srgbClr val="D8DEE6"/>
+            </a:solidFill>
+          </a:ln>
+          <a:effectLst/>
+        </p:spPr>
+        <p:style>
+          <a:lnRef idx="1">
+            <a:schemeClr val="accent1"/>
+          </a:lnRef>
+          <a:fillRef idx="3">
+            <a:schemeClr val="accent1"/>
+          </a:fillRef>
+          <a:effectRef idx="2">
+            <a:schemeClr val="accent1"/>
+          </a:effectRef>
+          <a:fontRef idx="minor">
+            <a:schemeClr val="lt1"/>
+          </a:fontRef>
+        </p:style>
+        <p:txBody>
+          <a:bodyPr rtlCol="0" anchor="ctr" wrap="square"/>
+          <a:lstStyle/>
+          <a:p>
+            <a:pPr algn="ctr"/>
+            <a:r>
+              <a:rPr sz="1050" b="0" i="0">
+                <a:solidFill>
+                  <a:srgbClr val="2B2B2B"/>
+                </a:solidFill>
+                <a:latin typeface="Calibri"/>
+              </a:rPr>
+              <a:t>1.5881</a:t>
+            </a:r>
+          </a:p>
+        </p:txBody>
+      </p:sp>
+      <p:sp>
+        <p:nvSpPr>
+          <p:cNvPr id="35" name="Rectangle 34"/>
+          <p:cNvSpPr/>
+          <p:nvPr/>
+        </p:nvSpPr>
+        <p:spPr>
+          <a:xfrm>
+            <a:off x="3474720" y="4069080"/>
+            <a:ext cx="1417320" cy="365760"/>
+          </a:xfrm>
+          <a:prstGeom prst="rect">
+            <a:avLst/>
+          </a:prstGeom>
+          <a:solidFill>
+            <a:srgbClr val="FFFFFF"/>
+          </a:solidFill>
+          <a:ln w="9525">
+            <a:solidFill>
+              <a:srgbClr val="D8DEE6"/>
+            </a:solidFill>
+          </a:ln>
+          <a:effectLst/>
+        </p:spPr>
+        <p:style>
+          <a:lnRef idx="1">
+            <a:schemeClr val="accent1"/>
+          </a:lnRef>
+          <a:fillRef idx="3">
+            <a:schemeClr val="accent1"/>
+          </a:fillRef>
+          <a:effectRef idx="2">
+            <a:schemeClr val="accent1"/>
+          </a:effectRef>
+          <a:fontRef idx="minor">
+            <a:schemeClr val="lt1"/>
+          </a:fontRef>
+        </p:style>
+        <p:txBody>
+          <a:bodyPr rtlCol="0" anchor="ctr" wrap="square"/>
+          <a:lstStyle/>
+          <a:p>
+            <a:pPr algn="ctr"/>
+            <a:r>
+              <a:rPr sz="1050" b="0" i="0">
+                <a:solidFill>
+                  <a:srgbClr val="2B2B2B"/>
+                </a:solidFill>
+                <a:latin typeface="Calibri"/>
+              </a:rPr>
+              <a:t>1.6488</a:t>
+            </a:r>
+          </a:p>
+        </p:txBody>
+      </p:sp>
+      <p:sp>
+        <p:nvSpPr>
+          <p:cNvPr id="36" name="Rectangle 35"/>
+          <p:cNvSpPr/>
+          <p:nvPr/>
+        </p:nvSpPr>
+        <p:spPr>
+          <a:xfrm>
+            <a:off x="4892040" y="4069080"/>
+            <a:ext cx="1417320" cy="365760"/>
+          </a:xfrm>
+          <a:prstGeom prst="rect">
+            <a:avLst/>
+          </a:prstGeom>
+          <a:solidFill>
+            <a:srgbClr val="FFFFFF"/>
+          </a:solidFill>
+          <a:ln w="9525">
+            <a:solidFill>
+              <a:srgbClr val="D8DEE6"/>
+            </a:solidFill>
+          </a:ln>
+          <a:effectLst/>
+        </p:spPr>
+        <p:style>
+          <a:lnRef idx="1">
+            <a:schemeClr val="accent1"/>
+          </a:lnRef>
+          <a:fillRef idx="3">
+            <a:schemeClr val="accent1"/>
+          </a:fillRef>
+          <a:effectRef idx="2">
+            <a:schemeClr val="accent1"/>
+          </a:effectRef>
+          <a:fontRef idx="minor">
+            <a:schemeClr val="lt1"/>
+          </a:fontRef>
+        </p:style>
+        <p:txBody>
+          <a:bodyPr rtlCol="0" anchor="ctr" wrap="square"/>
+          <a:lstStyle/>
+          <a:p>
+            <a:pPr algn="ctr"/>
+            <a:r>
+              <a:rPr sz="1050" b="0" i="0">
+                <a:solidFill>
+                  <a:srgbClr val="2B2B2B"/>
+                </a:solidFill>
+                <a:latin typeface="Calibri"/>
+              </a:rPr>
+              <a:t>1.5951</a:t>
+            </a:r>
+          </a:p>
+        </p:txBody>
+      </p:sp>
+      <p:sp>
+        <p:nvSpPr>
+          <p:cNvPr id="37" name="Rectangle 36"/>
+          <p:cNvSpPr/>
+          <p:nvPr/>
+        </p:nvSpPr>
+        <p:spPr>
+          <a:xfrm>
+            <a:off x="6309359" y="4069080"/>
+            <a:ext cx="2377440" cy="365760"/>
+          </a:xfrm>
+          <a:prstGeom prst="rect">
+            <a:avLst/>
+          </a:prstGeom>
+          <a:solidFill>
+            <a:srgbClr val="FFFFFF"/>
+          </a:solidFill>
+          <a:ln w="9525">
+            <a:solidFill>
+              <a:srgbClr val="D8DEE6"/>
+            </a:solidFill>
+          </a:ln>
+          <a:effectLst/>
+        </p:spPr>
+        <p:style>
+          <a:lnRef idx="1">
+            <a:schemeClr val="accent1"/>
+          </a:lnRef>
+          <a:fillRef idx="3">
+            <a:schemeClr val="accent1"/>
+          </a:fillRef>
+          <a:effectRef idx="2">
+            <a:schemeClr val="accent1"/>
+          </a:effectRef>
+          <a:fontRef idx="minor">
+            <a:schemeClr val="lt1"/>
+          </a:fontRef>
+        </p:style>
+        <p:txBody>
+          <a:bodyPr rtlCol="0" anchor="ctr" wrap="square"/>
+          <a:lstStyle/>
+          <a:p>
+            <a:pPr algn="ctr"/>
+            <a:r>
+              <a:rPr sz="1050" b="1" i="0">
+                <a:solidFill>
+                  <a:srgbClr val="D97A0B"/>
+                </a:solidFill>
+                <a:latin typeface="Calibri"/>
+              </a:rPr>
+              <a:t>−0.0536</a:t>
+            </a:r>
+          </a:p>
+        </p:txBody>
+      </p:sp>
+      <p:sp>
+        <p:nvSpPr>
+          <p:cNvPr id="38" name="Rectangle 37"/>
+          <p:cNvSpPr/>
+          <p:nvPr/>
+        </p:nvSpPr>
+        <p:spPr>
+          <a:xfrm>
+            <a:off x="777240" y="4434840"/>
+            <a:ext cx="685800" cy="365760"/>
+          </a:xfrm>
+          <a:prstGeom prst="rect">
+            <a:avLst/>
+          </a:prstGeom>
+          <a:solidFill>
+            <a:srgbClr val="F4F7FB"/>
+          </a:solidFill>
+          <a:ln w="9525">
+            <a:solidFill>
+              <a:srgbClr val="D8DEE6"/>
+            </a:solidFill>
+          </a:ln>
+          <a:effectLst/>
+        </p:spPr>
+        <p:style>
+          <a:lnRef idx="1">
+            <a:schemeClr val="accent1"/>
+          </a:lnRef>
+          <a:fillRef idx="3">
+            <a:schemeClr val="accent1"/>
+          </a:fillRef>
+          <a:effectRef idx="2">
+            <a:schemeClr val="accent1"/>
+          </a:effectRef>
+          <a:fontRef idx="minor">
+            <a:schemeClr val="lt1"/>
+          </a:fontRef>
+        </p:style>
+        <p:txBody>
+          <a:bodyPr rtlCol="0" anchor="ctr" wrap="square"/>
+          <a:lstStyle/>
+          <a:p>
+            <a:pPr algn="ctr"/>
+            <a:r>
+              <a:rPr sz="1050" b="0" i="0">
+                <a:solidFill>
+                  <a:srgbClr val="2B2B2B"/>
+                </a:solidFill>
+                <a:latin typeface="Calibri"/>
+              </a:rPr>
+              <a:t>0.5</a:t>
+            </a:r>
+          </a:p>
+        </p:txBody>
+      </p:sp>
+      <p:sp>
+        <p:nvSpPr>
+          <p:cNvPr id="39" name="Rectangle 38"/>
+          <p:cNvSpPr/>
+          <p:nvPr/>
+        </p:nvSpPr>
+        <p:spPr>
+          <a:xfrm>
+            <a:off x="1463040" y="4434840"/>
+            <a:ext cx="594360" cy="365760"/>
+          </a:xfrm>
+          <a:prstGeom prst="rect">
+            <a:avLst/>
+          </a:prstGeom>
+          <a:solidFill>
+            <a:srgbClr val="F4F7FB"/>
+          </a:solidFill>
+          <a:ln w="9525">
+            <a:solidFill>
+              <a:srgbClr val="D8DEE6"/>
+            </a:solidFill>
+          </a:ln>
+          <a:effectLst/>
+        </p:spPr>
+        <p:style>
+          <a:lnRef idx="1">
+            <a:schemeClr val="accent1"/>
+          </a:lnRef>
+          <a:fillRef idx="3">
+            <a:schemeClr val="accent1"/>
+          </a:fillRef>
+          <a:effectRef idx="2">
+            <a:schemeClr val="accent1"/>
+          </a:effectRef>
+          <a:fontRef idx="minor">
+            <a:schemeClr val="lt1"/>
+          </a:fontRef>
+        </p:style>
+        <p:txBody>
+          <a:bodyPr rtlCol="0" anchor="ctr" wrap="square"/>
+          <a:lstStyle/>
+          <a:p>
+            <a:pPr algn="ctr"/>
+            <a:r>
+              <a:rPr sz="1050" b="0" i="0">
+                <a:solidFill>
+                  <a:srgbClr val="2B2B2B"/>
+                </a:solidFill>
+                <a:latin typeface="Calibri"/>
+              </a:rPr>
+              <a:t>100</a:t>
+            </a:r>
+          </a:p>
+        </p:txBody>
+      </p:sp>
+      <p:sp>
+        <p:nvSpPr>
+          <p:cNvPr id="40" name="Rectangle 39"/>
+          <p:cNvSpPr/>
+          <p:nvPr/>
+        </p:nvSpPr>
+        <p:spPr>
+          <a:xfrm>
+            <a:off x="2057400" y="4434840"/>
+            <a:ext cx="1417320" cy="365760"/>
+          </a:xfrm>
+          <a:prstGeom prst="rect">
+            <a:avLst/>
+          </a:prstGeom>
+          <a:solidFill>
+            <a:srgbClr val="F4F7FB"/>
+          </a:solidFill>
+          <a:ln w="9525">
+            <a:solidFill>
+              <a:srgbClr val="D8DEE6"/>
+            </a:solidFill>
+          </a:ln>
+          <a:effectLst/>
+        </p:spPr>
+        <p:style>
+          <a:lnRef idx="1">
+            <a:schemeClr val="accent1"/>
+          </a:lnRef>
+          <a:fillRef idx="3">
+            <a:schemeClr val="accent1"/>
+          </a:fillRef>
+          <a:effectRef idx="2">
+            <a:schemeClr val="accent1"/>
+          </a:effectRef>
+          <a:fontRef idx="minor">
+            <a:schemeClr val="lt1"/>
+          </a:fontRef>
+        </p:style>
+        <p:txBody>
+          <a:bodyPr rtlCol="0" anchor="ctr" wrap="square"/>
+          <a:lstStyle/>
+          <a:p>
+            <a:pPr algn="ctr"/>
+            <a:r>
+              <a:rPr sz="1050" b="0" i="0">
+                <a:solidFill>
+                  <a:srgbClr val="2B2B2B"/>
+                </a:solidFill>
+                <a:latin typeface="Calibri"/>
+              </a:rPr>
+              <a:t>2.0186</a:t>
+            </a:r>
+          </a:p>
+        </p:txBody>
+      </p:sp>
+      <p:sp>
+        <p:nvSpPr>
+          <p:cNvPr id="41" name="Rectangle 40"/>
+          <p:cNvSpPr/>
+          <p:nvPr/>
+        </p:nvSpPr>
+        <p:spPr>
+          <a:xfrm>
+            <a:off x="3474720" y="4434840"/>
+            <a:ext cx="1417320" cy="365760"/>
+          </a:xfrm>
+          <a:prstGeom prst="rect">
+            <a:avLst/>
+          </a:prstGeom>
+          <a:solidFill>
+            <a:srgbClr val="F4F7FB"/>
+          </a:solidFill>
+          <a:ln w="9525">
+            <a:solidFill>
+              <a:srgbClr val="D8DEE6"/>
+            </a:solidFill>
+          </a:ln>
+          <a:effectLst/>
+        </p:spPr>
+        <p:style>
+          <a:lnRef idx="1">
+            <a:schemeClr val="accent1"/>
+          </a:lnRef>
+          <a:fillRef idx="3">
+            <a:schemeClr val="accent1"/>
+          </a:fillRef>
+          <a:effectRef idx="2">
+            <a:schemeClr val="accent1"/>
+          </a:effectRef>
+          <a:fontRef idx="minor">
+            <a:schemeClr val="lt1"/>
+          </a:fontRef>
+        </p:style>
+        <p:txBody>
+          <a:bodyPr rtlCol="0" anchor="ctr" wrap="square"/>
+          <a:lstStyle/>
+          <a:p>
+            <a:pPr algn="ctr"/>
+            <a:r>
+              <a:rPr sz="1050" b="0" i="0">
+                <a:solidFill>
+                  <a:srgbClr val="2B2B2B"/>
+                </a:solidFill>
+                <a:latin typeface="Calibri"/>
+              </a:rPr>
+              <a:t>2.0894</a:t>
+            </a:r>
+          </a:p>
+        </p:txBody>
+      </p:sp>
+      <p:sp>
+        <p:nvSpPr>
+          <p:cNvPr id="42" name="Rectangle 41"/>
+          <p:cNvSpPr/>
+          <p:nvPr/>
+        </p:nvSpPr>
+        <p:spPr>
+          <a:xfrm>
+            <a:off x="4892040" y="4434840"/>
+            <a:ext cx="1417320" cy="365760"/>
+          </a:xfrm>
+          <a:prstGeom prst="rect">
+            <a:avLst/>
+          </a:prstGeom>
+          <a:solidFill>
+            <a:srgbClr val="F4F7FB"/>
+          </a:solidFill>
+          <a:ln w="9525">
+            <a:solidFill>
+              <a:srgbClr val="D8DEE6"/>
+            </a:solidFill>
+          </a:ln>
+          <a:effectLst/>
+        </p:spPr>
+        <p:style>
+          <a:lnRef idx="1">
+            <a:schemeClr val="accent1"/>
+          </a:lnRef>
+          <a:fillRef idx="3">
+            <a:schemeClr val="accent1"/>
+          </a:fillRef>
+          <a:effectRef idx="2">
+            <a:schemeClr val="accent1"/>
+          </a:effectRef>
+          <a:fontRef idx="minor">
+            <a:schemeClr val="lt1"/>
+          </a:fontRef>
+        </p:style>
+        <p:txBody>
+          <a:bodyPr rtlCol="0" anchor="ctr" wrap="square"/>
+          <a:lstStyle/>
+          <a:p>
+            <a:pPr algn="ctr"/>
+            <a:r>
+              <a:rPr sz="1050" b="0" i="0">
+                <a:solidFill>
+                  <a:srgbClr val="2B2B2B"/>
+                </a:solidFill>
+                <a:latin typeface="Calibri"/>
+              </a:rPr>
+              <a:t>1.9756</a:t>
+            </a:r>
+          </a:p>
+        </p:txBody>
+      </p:sp>
+      <p:sp>
+        <p:nvSpPr>
+          <p:cNvPr id="43" name="Rectangle 42"/>
+          <p:cNvSpPr/>
+          <p:nvPr/>
+        </p:nvSpPr>
+        <p:spPr>
+          <a:xfrm>
+            <a:off x="6309359" y="4434840"/>
+            <a:ext cx="2377440" cy="365760"/>
+          </a:xfrm>
+          <a:prstGeom prst="rect">
+            <a:avLst/>
+          </a:prstGeom>
+          <a:solidFill>
+            <a:srgbClr val="F4F7FB"/>
+          </a:solidFill>
+          <a:ln w="9525">
+            <a:solidFill>
+              <a:srgbClr val="D8DEE6"/>
+            </a:solidFill>
+          </a:ln>
+          <a:effectLst/>
+        </p:spPr>
+        <p:style>
+          <a:lnRef idx="1">
+            <a:schemeClr val="accent1"/>
+          </a:lnRef>
+          <a:fillRef idx="3">
+            <a:schemeClr val="accent1"/>
+          </a:fillRef>
+          <a:effectRef idx="2">
+            <a:schemeClr val="accent1"/>
+          </a:effectRef>
+          <a:fontRef idx="minor">
+            <a:schemeClr val="lt1"/>
+          </a:fontRef>
+        </p:style>
+        <p:txBody>
+          <a:bodyPr rtlCol="0" anchor="ctr" wrap="square"/>
+          <a:lstStyle/>
+          <a:p>
+            <a:pPr algn="ctr"/>
+            <a:r>
+              <a:rPr sz="1050" b="1" i="0">
+                <a:solidFill>
+                  <a:srgbClr val="D97A0B"/>
+                </a:solidFill>
+                <a:latin typeface="Calibri"/>
+              </a:rPr>
+              <a:t>−0.1138</a:t>
+            </a:r>
+          </a:p>
+        </p:txBody>
+      </p:sp>
+      <p:sp>
+        <p:nvSpPr>
+          <p:cNvPr id="44" name="Rectangle 43"/>
+          <p:cNvSpPr/>
+          <p:nvPr/>
+        </p:nvSpPr>
+        <p:spPr>
+          <a:xfrm>
+            <a:off x="777240" y="4800600"/>
+            <a:ext cx="685800" cy="365760"/>
+          </a:xfrm>
+          <a:prstGeom prst="rect">
+            <a:avLst/>
+          </a:prstGeom>
+          <a:solidFill>
+            <a:srgbClr val="FFFFFF"/>
+          </a:solidFill>
+          <a:ln w="9525">
+            <a:solidFill>
+              <a:srgbClr val="D8DEE6"/>
+            </a:solidFill>
+          </a:ln>
+          <a:effectLst/>
+        </p:spPr>
+        <p:style>
+          <a:lnRef idx="1">
+            <a:schemeClr val="accent1"/>
+          </a:lnRef>
+          <a:fillRef idx="3">
+            <a:schemeClr val="accent1"/>
+          </a:fillRef>
+          <a:effectRef idx="2">
+            <a:schemeClr val="accent1"/>
+          </a:effectRef>
+          <a:fontRef idx="minor">
+            <a:schemeClr val="lt1"/>
+          </a:fontRef>
+        </p:style>
+        <p:txBody>
+          <a:bodyPr rtlCol="0" anchor="ctr" wrap="square"/>
+          <a:lstStyle/>
+          <a:p>
+            <a:pPr algn="ctr"/>
+            <a:r>
+              <a:rPr sz="1050" b="0" i="0">
+                <a:solidFill>
+                  <a:srgbClr val="2B2B2B"/>
+                </a:solidFill>
+                <a:latin typeface="Calibri"/>
+              </a:rPr>
+              <a:t>1.0</a:t>
+            </a:r>
+          </a:p>
+        </p:txBody>
+      </p:sp>
+      <p:sp>
+        <p:nvSpPr>
+          <p:cNvPr id="45" name="Rectangle 44"/>
+          <p:cNvSpPr/>
+          <p:nvPr/>
+        </p:nvSpPr>
+        <p:spPr>
+          <a:xfrm>
+            <a:off x="1463040" y="4800600"/>
+            <a:ext cx="594360" cy="365760"/>
+          </a:xfrm>
+          <a:prstGeom prst="rect">
+            <a:avLst/>
+          </a:prstGeom>
+          <a:solidFill>
+            <a:srgbClr val="FFFFFF"/>
+          </a:solidFill>
+          <a:ln w="9525">
+            <a:solidFill>
+              <a:srgbClr val="D8DEE6"/>
+            </a:solidFill>
+          </a:ln>
+          <a:effectLst/>
+        </p:spPr>
+        <p:style>
+          <a:lnRef idx="1">
+            <a:schemeClr val="accent1"/>
+          </a:lnRef>
+          <a:fillRef idx="3">
+            <a:schemeClr val="accent1"/>
+          </a:fillRef>
+          <a:effectRef idx="2">
+            <a:schemeClr val="accent1"/>
+          </a:effectRef>
+          <a:fontRef idx="minor">
+            <a:schemeClr val="lt1"/>
+          </a:fontRef>
+        </p:style>
+        <p:txBody>
+          <a:bodyPr rtlCol="0" anchor="ctr" wrap="square"/>
+          <a:lstStyle/>
+          <a:p>
+            <a:pPr algn="ctr"/>
+            <a:r>
+              <a:rPr sz="1050" b="0" i="0">
+                <a:solidFill>
+                  <a:srgbClr val="2B2B2B"/>
+                </a:solidFill>
+                <a:latin typeface="Calibri"/>
+              </a:rPr>
+              <a:t>100</a:t>
+            </a:r>
+          </a:p>
+        </p:txBody>
+      </p:sp>
+      <p:sp>
+        <p:nvSpPr>
+          <p:cNvPr id="46" name="Rectangle 45"/>
+          <p:cNvSpPr/>
+          <p:nvPr/>
+        </p:nvSpPr>
+        <p:spPr>
+          <a:xfrm>
+            <a:off x="2057400" y="4800600"/>
+            <a:ext cx="1417320" cy="365760"/>
+          </a:xfrm>
+          <a:prstGeom prst="rect">
+            <a:avLst/>
+          </a:prstGeom>
+          <a:solidFill>
+            <a:srgbClr val="FFFFFF"/>
+          </a:solidFill>
+          <a:ln w="9525">
+            <a:solidFill>
+              <a:srgbClr val="D8DEE6"/>
+            </a:solidFill>
+          </a:ln>
+          <a:effectLst/>
+        </p:spPr>
+        <p:style>
+          <a:lnRef idx="1">
+            <a:schemeClr val="accent1"/>
+          </a:lnRef>
+          <a:fillRef idx="3">
+            <a:schemeClr val="accent1"/>
+          </a:fillRef>
+          <a:effectRef idx="2">
+            <a:schemeClr val="accent1"/>
+          </a:effectRef>
+          <a:fontRef idx="minor">
+            <a:schemeClr val="lt1"/>
+          </a:fontRef>
+        </p:style>
+        <p:txBody>
+          <a:bodyPr rtlCol="0" anchor="ctr" wrap="square"/>
+          <a:lstStyle/>
+          <a:p>
+            <a:pPr algn="ctr"/>
+            <a:r>
+              <a:rPr sz="1050" b="0" i="0">
+                <a:solidFill>
+                  <a:srgbClr val="2B2B2B"/>
+                </a:solidFill>
+                <a:latin typeface="Calibri"/>
+              </a:rPr>
+              <a:t>1.9841</a:t>
+            </a:r>
+          </a:p>
+        </p:txBody>
+      </p:sp>
+      <p:sp>
+        <p:nvSpPr>
+          <p:cNvPr id="47" name="Rectangle 46"/>
+          <p:cNvSpPr/>
+          <p:nvPr/>
+        </p:nvSpPr>
+        <p:spPr>
+          <a:xfrm>
+            <a:off x="3474720" y="4800600"/>
+            <a:ext cx="1417320" cy="365760"/>
+          </a:xfrm>
+          <a:prstGeom prst="rect">
+            <a:avLst/>
+          </a:prstGeom>
+          <a:solidFill>
+            <a:srgbClr val="FFFFFF"/>
+          </a:solidFill>
+          <a:ln w="9525">
+            <a:solidFill>
+              <a:srgbClr val="D8DEE6"/>
+            </a:solidFill>
+          </a:ln>
+          <a:effectLst/>
+        </p:spPr>
+        <p:style>
+          <a:lnRef idx="1">
+            <a:schemeClr val="accent1"/>
+          </a:lnRef>
+          <a:fillRef idx="3">
+            <a:schemeClr val="accent1"/>
+          </a:fillRef>
+          <a:effectRef idx="2">
+            <a:schemeClr val="accent1"/>
+          </a:effectRef>
+          <a:fontRef idx="minor">
+            <a:schemeClr val="lt1"/>
+          </a:fontRef>
+        </p:style>
+        <p:txBody>
+          <a:bodyPr rtlCol="0" anchor="ctr" wrap="square"/>
+          <a:lstStyle/>
+          <a:p>
+            <a:pPr algn="ctr"/>
+            <a:r>
+              <a:rPr sz="1050" b="0" i="0">
+                <a:solidFill>
+                  <a:srgbClr val="2B2B2B"/>
+                </a:solidFill>
+                <a:latin typeface="Calibri"/>
+              </a:rPr>
+              <a:t>2.1158</a:t>
+            </a:r>
+          </a:p>
+        </p:txBody>
+      </p:sp>
+      <p:sp>
+        <p:nvSpPr>
+          <p:cNvPr id="48" name="Rectangle 47"/>
+          <p:cNvSpPr/>
+          <p:nvPr/>
+        </p:nvSpPr>
+        <p:spPr>
+          <a:xfrm>
+            <a:off x="4892040" y="4800600"/>
+            <a:ext cx="1417320" cy="365760"/>
+          </a:xfrm>
+          <a:prstGeom prst="rect">
+            <a:avLst/>
+          </a:prstGeom>
+          <a:solidFill>
+            <a:srgbClr val="FFFFFF"/>
+          </a:solidFill>
+          <a:ln w="9525">
+            <a:solidFill>
+              <a:srgbClr val="D8DEE6"/>
+            </a:solidFill>
+          </a:ln>
+          <a:effectLst/>
+        </p:spPr>
+        <p:style>
+          <a:lnRef idx="1">
+            <a:schemeClr val="accent1"/>
+          </a:lnRef>
+          <a:fillRef idx="3">
+            <a:schemeClr val="accent1"/>
+          </a:fillRef>
+          <a:effectRef idx="2">
+            <a:schemeClr val="accent1"/>
+          </a:effectRef>
+          <a:fontRef idx="minor">
+            <a:schemeClr val="lt1"/>
+          </a:fontRef>
+        </p:style>
+        <p:txBody>
+          <a:bodyPr rtlCol="0" anchor="ctr" wrap="square"/>
+          <a:lstStyle/>
+          <a:p>
+            <a:pPr algn="ctr"/>
+            <a:r>
+              <a:rPr sz="1050" b="0" i="0">
+                <a:solidFill>
+                  <a:srgbClr val="2B2B2B"/>
+                </a:solidFill>
+                <a:latin typeface="Calibri"/>
+              </a:rPr>
+              <a:t>1.9777</a:t>
+            </a:r>
+          </a:p>
+        </p:txBody>
+      </p:sp>
+      <p:sp>
+        <p:nvSpPr>
+          <p:cNvPr id="49" name="Rectangle 48"/>
+          <p:cNvSpPr/>
+          <p:nvPr/>
+        </p:nvSpPr>
+        <p:spPr>
+          <a:xfrm>
+            <a:off x="6309359" y="4800600"/>
+            <a:ext cx="2377440" cy="365760"/>
+          </a:xfrm>
+          <a:prstGeom prst="rect">
+            <a:avLst/>
+          </a:prstGeom>
+          <a:solidFill>
+            <a:srgbClr val="FFFFFF"/>
+          </a:solidFill>
+          <a:ln w="9525">
+            <a:solidFill>
+              <a:srgbClr val="D8DEE6"/>
+            </a:solidFill>
+          </a:ln>
+          <a:effectLst/>
+        </p:spPr>
+        <p:style>
+          <a:lnRef idx="1">
+            <a:schemeClr val="accent1"/>
+          </a:lnRef>
+          <a:fillRef idx="3">
+            <a:schemeClr val="accent1"/>
+          </a:fillRef>
+          <a:effectRef idx="2">
+            <a:schemeClr val="accent1"/>
+          </a:effectRef>
+          <a:fontRef idx="minor">
+            <a:schemeClr val="lt1"/>
+          </a:fontRef>
+        </p:style>
+        <p:txBody>
+          <a:bodyPr rtlCol="0" anchor="ctr" wrap="square"/>
+          <a:lstStyle/>
+          <a:p>
+            <a:pPr algn="ctr"/>
+            <a:r>
+              <a:rPr sz="1050" b="1" i="0">
+                <a:solidFill>
+                  <a:srgbClr val="D97A0B"/>
+                </a:solidFill>
+                <a:latin typeface="Calibri"/>
+              </a:rPr>
+              <a:t>−0.1381</a:t>
+            </a:r>
+          </a:p>
+        </p:txBody>
+      </p:sp>
+      <p:sp>
+        <p:nvSpPr>
+          <p:cNvPr id="50" name="TextBox 49"/>
+          <p:cNvSpPr txBox="1"/>
+          <p:nvPr/>
+        </p:nvSpPr>
+        <p:spPr>
+          <a:xfrm>
+            <a:off x="777240" y="5349240"/>
+            <a:ext cx="10637215" cy="914400"/>
+          </a:xfrm>
+          <a:prstGeom prst="rect">
+            <a:avLst/>
+          </a:prstGeom>
+          <a:noFill/>
+        </p:spPr>
+        <p:txBody>
+          <a:bodyPr wrap="square" anchor="t" lIns="0" rIns="0" tIns="0" bIns="0">
+            <a:spAutoFit/>
+          </a:bodyPr>
+          <a:lstStyle/>
+          <a:p>
+            <a:pPr>
+              <a:spcBef>
+                <a:spcPts val="0"/>
+              </a:spcBef>
+              <a:spcAft>
+                <a:spcPts val="600"/>
+              </a:spcAft>
+            </a:pPr>
+            <a:r>
+              <a:rPr sz="1300" b="0" i="0">
+                <a:solidFill>
+                  <a:srgbClr val="2B2B2B"/>
+                </a:solidFill>
+                <a:latin typeface="Calibri"/>
+              </a:rPr>
+              <a:t>Collision-ablated loss is at or above baseline in five of six cells; the one cell below (θ = 0, k = 40) is inside the random control’s own spread (SD ≈ 0.011–0.018). At k = 100, collision is worse than random at every θ.</a:t>
+            </a:r>
+          </a:p>
           <a:p>
             <a:pPr>
               <a:spcBef>
@@ -9370,303 +13425,13 @@
               </a:spcAft>
             </a:pPr>
             <a:r>
-              <a:rPr sz="1200" b="1" i="0">
+              <a:rPr sz="1300" b="1" i="0">
                 <a:solidFill>
                   <a:srgbClr val="D97A0B"/>
                 </a:solidFill>
                 <a:latin typeface="Calibri"/>
               </a:rPr>
-              <a:t>[ FILL AFTER SWEEP — structure fixed, numbers pending ]</a:t>
-            </a:r>
-          </a:p>
-        </p:txBody>
-      </p:sp>
-      <p:sp>
-        <p:nvSpPr>
-          <p:cNvPr id="6" name="TextBox 5"/>
-          <p:cNvSpPr txBox="1"/>
-          <p:nvPr/>
-        </p:nvSpPr>
-        <p:spPr>
-          <a:xfrm>
-            <a:off x="777240" y="2377440"/>
-            <a:ext cx="10637215" cy="3749039"/>
-          </a:xfrm>
-          <a:prstGeom prst="rect">
-            <a:avLst/>
-          </a:prstGeom>
-          <a:noFill/>
-        </p:spPr>
-        <p:txBody>
-          <a:bodyPr wrap="square" anchor="t" lIns="0" rIns="0" tIns="0" bIns="0">
-            <a:spAutoFit/>
-          </a:bodyPr>
-          <a:lstStyle/>
-          <a:p/>
-        </p:txBody>
-      </p:sp>
-      <p:sp>
-        <p:nvSpPr>
-          <p:cNvPr id="7" name="TextBox 6"/>
-          <p:cNvSpPr txBox="1"/>
-          <p:nvPr/>
-        </p:nvSpPr>
-        <p:spPr>
-          <a:xfrm>
-            <a:off x="777240" y="6355080"/>
-            <a:ext cx="10637215" cy="320040"/>
-          </a:xfrm>
-          <a:prstGeom prst="rect">
-            <a:avLst/>
-          </a:prstGeom>
-          <a:noFill/>
-        </p:spPr>
-        <p:txBody>
-          <a:bodyPr wrap="square" anchor="t" lIns="0" rIns="0" tIns="0" bIns="0">
-            <a:spAutoFit/>
-          </a:bodyPr>
-          <a:lstStyle/>
-          <a:p>
-            <a:r>
-              <a:rPr sz="1000" b="0" i="1">
-                <a:solidFill>
-                  <a:srgbClr val="707A8A"/>
-                </a:solidFill>
-                <a:latin typeface="Calibri"/>
-              </a:rPr>
-              <a:t>Technical correctness (25) + learning effectiveness (15)</a:t>
-            </a:r>
-          </a:p>
-        </p:txBody>
-      </p:sp>
-      <p:sp>
-        <p:nvSpPr>
-          <p:cNvPr id="8" name="TextBox 7"/>
-          <p:cNvSpPr txBox="1"/>
-          <p:nvPr/>
-        </p:nvSpPr>
-        <p:spPr>
-          <a:xfrm>
-            <a:off x="10865815" y="6355080"/>
-            <a:ext cx="548640" cy="320040"/>
-          </a:xfrm>
-          <a:prstGeom prst="rect">
-            <a:avLst/>
-          </a:prstGeom>
-          <a:noFill/>
-        </p:spPr>
-        <p:txBody>
-          <a:bodyPr wrap="square" anchor="t" lIns="0" rIns="0" tIns="0" bIns="0">
-            <a:spAutoFit/>
-          </a:bodyPr>
-          <a:lstStyle/>
-          <a:p>
-            <a:pPr algn="r"/>
-            <a:r>
-              <a:rPr sz="1000" b="0" i="0">
-                <a:solidFill>
-                  <a:srgbClr val="707A8A"/>
-                </a:solidFill>
-                <a:latin typeface="Calibri"/>
-              </a:rPr>
-              <a:t>9</a:t>
-            </a:r>
-          </a:p>
-        </p:txBody>
-      </p:sp>
-      <p:sp>
-        <p:nvSpPr>
-          <p:cNvPr id="9" name="Rectangle 8"/>
-          <p:cNvSpPr/>
-          <p:nvPr/>
-        </p:nvSpPr>
-        <p:spPr>
-          <a:xfrm>
-            <a:off x="777240" y="2788920"/>
-            <a:ext cx="5029200" cy="2148840"/>
-          </a:xfrm>
-          <a:prstGeom prst="rect">
-            <a:avLst/>
-          </a:prstGeom>
-          <a:solidFill>
-            <a:srgbClr val="F4F7FB"/>
-          </a:solidFill>
-          <a:ln>
-            <a:solidFill>
-              <a:srgbClr val="D8DEE6"/>
-            </a:solidFill>
-          </a:ln>
-          <a:effectLst/>
-        </p:spPr>
-        <p:style>
-          <a:lnRef idx="1">
-            <a:schemeClr val="accent1"/>
-          </a:lnRef>
-          <a:fillRef idx="3">
-            <a:schemeClr val="accent1"/>
-          </a:fillRef>
-          <a:effectRef idx="2">
-            <a:schemeClr val="accent1"/>
-          </a:effectRef>
-          <a:fontRef idx="minor">
-            <a:schemeClr val="lt1"/>
-          </a:fontRef>
-        </p:style>
-        <p:txBody>
-          <a:bodyPr rtlCol="0" anchor="ctr" wrap="square"/>
-          <a:lstStyle/>
-          <a:p>
-            <a:pPr algn="ctr"/>
-            <a:r>
-              <a:rPr sz="1300" b="1" i="0">
-                <a:solidFill>
-                  <a:srgbClr val="707A8A"/>
-                </a:solidFill>
-                <a:latin typeface="Calibri"/>
-              </a:rPr>
-              <a:t>
-MERGED — damaged</a:t>
-            </a:r>
-          </a:p>
-          <a:p>
-            <a:pPr algn="ctr"/>
-            <a:r>
-              <a:rPr sz="1100" b="0" i="0">
-                <a:solidFill>
-                  <a:srgbClr val="707A8A"/>
-                </a:solidFill>
-                <a:latin typeface="Calibri"/>
-              </a:rPr>
-              <a:t>neuron heat-map + generated output</a:t>
-            </a:r>
-          </a:p>
-        </p:txBody>
-      </p:sp>
-      <p:sp>
-        <p:nvSpPr>
-          <p:cNvPr id="10" name="Rectangle 9"/>
-          <p:cNvSpPr/>
-          <p:nvPr/>
-        </p:nvSpPr>
-        <p:spPr>
-          <a:xfrm>
-            <a:off x="6263640" y="2788920"/>
-            <a:ext cx="5029200" cy="2148840"/>
-          </a:xfrm>
-          <a:prstGeom prst="rect">
-            <a:avLst/>
-          </a:prstGeom>
-          <a:solidFill>
-            <a:srgbClr val="F4F7FB"/>
-          </a:solidFill>
-          <a:ln>
-            <a:solidFill>
-              <a:srgbClr val="D8DEE6"/>
-            </a:solidFill>
-          </a:ln>
-          <a:effectLst/>
-        </p:spPr>
-        <p:style>
-          <a:lnRef idx="1">
-            <a:schemeClr val="accent1"/>
-          </a:lnRef>
-          <a:fillRef idx="3">
-            <a:schemeClr val="accent1"/>
-          </a:fillRef>
-          <a:effectRef idx="2">
-            <a:schemeClr val="accent1"/>
-          </a:effectRef>
-          <a:fontRef idx="minor">
-            <a:schemeClr val="lt1"/>
-          </a:fontRef>
-        </p:style>
-        <p:txBody>
-          <a:bodyPr rtlCol="0" anchor="ctr" wrap="square"/>
-          <a:lstStyle/>
-          <a:p>
-            <a:pPr algn="ctr"/>
-            <a:r>
-              <a:rPr sz="1300" b="1" i="0">
-                <a:solidFill>
-                  <a:srgbClr val="707A8A"/>
-                </a:solidFill>
-                <a:latin typeface="Calibri"/>
-              </a:rPr>
-              <a:t>
-AFTER ABLATING COLLISION NEURONS</a:t>
-            </a:r>
-          </a:p>
-          <a:p>
-            <a:pPr algn="ctr"/>
-            <a:r>
-              <a:rPr sz="1100" b="0" i="0">
-                <a:solidFill>
-                  <a:srgbClr val="707A8A"/>
-                </a:solidFill>
-                <a:latin typeface="Calibri"/>
-              </a:rPr>
-              <a:t>neuron heat-map + generated output</a:t>
-            </a:r>
-          </a:p>
-        </p:txBody>
-      </p:sp>
-      <p:sp>
-        <p:nvSpPr>
-          <p:cNvPr id="11" name="TextBox 10"/>
-          <p:cNvSpPr txBox="1"/>
-          <p:nvPr/>
-        </p:nvSpPr>
-        <p:spPr>
-          <a:xfrm>
-            <a:off x="777240" y="5166360"/>
-            <a:ext cx="10637215" cy="1005840"/>
-          </a:xfrm>
-          <a:prstGeom prst="rect">
-            <a:avLst/>
-          </a:prstGeom>
-          <a:noFill/>
-        </p:spPr>
-        <p:txBody>
-          <a:bodyPr wrap="square" anchor="t" lIns="0" rIns="0" tIns="0" bIns="0">
-            <a:spAutoFit/>
-          </a:bodyPr>
-          <a:lstStyle/>
-          <a:p>
-            <a:pPr>
-              <a:spcBef>
-                <a:spcPts val="0"/>
-              </a:spcBef>
-              <a:spcAft>
-                <a:spcPts val="600"/>
-              </a:spcAft>
-            </a:pPr>
-            <a:r>
-              <a:rPr sz="1350" b="0" i="0">
-                <a:solidFill>
-                  <a:srgbClr val="2B2B2B"/>
-                </a:solidFill>
-                <a:latin typeface="Calibri"/>
-              </a:rPr>
-              <a:t>Recovery of ___ against a random-ablation baseline of ___ at matched k. Recovery curve as a function of k, including where over-ablation starts to hurt.</a:t>
-            </a:r>
-          </a:p>
-          <a:p>
-            <a:pPr>
-              <a:spcBef>
-                <a:spcPts val="0"/>
-              </a:spcBef>
-              <a:spcAft>
-                <a:spcPts val="0"/>
-              </a:spcAft>
-            </a:pPr>
-            <a:r>
-              <a:rPr sz="1350" b="1" i="0">
-                <a:solidFill>
-                  <a:srgbClr val="D97A0B"/>
-                </a:solidFill>
-                <a:latin typeface="Calibri"/>
-              </a:rPr>
-              <a:t>If localization does not beat random, we report that — the phase diagram stands on its own.</a:t>
+              <a:t>Damage does not localize to the neurons this collision score identifies — the phase diagram result stands on its own regardless.</a:t>
             </a:r>
           </a:p>
         </p:txBody>
